--- a/Наработки/диздоки/Франция/Франция.pptx
+++ b/Наработки/диздоки/Франция/Франция.pptx
@@ -209,7 +209,7 @@
             <a:fld id="{33E3D7F9-E251-484C-A6FF-FA958879DF69}" type="datetimeFigureOut">
               <a:rPr lang="ru-RU" smtClean="0"/>
               <a:pPr/>
-              <a:t>10.11.2024</a:t>
+              <a:t>01.07.2026</a:t>
             </a:fld>
             <a:endParaRPr lang="ru-RU"/>
           </a:p>
@@ -699,7 +699,7 @@
             <a:fld id="{85A5DE44-605B-4D3B-B2B7-94543DF81A36}" type="datetimeFigureOut">
               <a:rPr lang="ru-RU" smtClean="0"/>
               <a:pPr/>
-              <a:t>10.11.2024</a:t>
+              <a:t>01.07.2026</a:t>
             </a:fld>
             <a:endParaRPr lang="ru-RU"/>
           </a:p>
@@ -871,7 +871,7 @@
             <a:fld id="{85A5DE44-605B-4D3B-B2B7-94543DF81A36}" type="datetimeFigureOut">
               <a:rPr lang="ru-RU" smtClean="0"/>
               <a:pPr/>
-              <a:t>10.11.2024</a:t>
+              <a:t>01.07.2026</a:t>
             </a:fld>
             <a:endParaRPr lang="ru-RU"/>
           </a:p>
@@ -1053,7 +1053,7 @@
             <a:fld id="{85A5DE44-605B-4D3B-B2B7-94543DF81A36}" type="datetimeFigureOut">
               <a:rPr lang="ru-RU" smtClean="0"/>
               <a:pPr/>
-              <a:t>10.11.2024</a:t>
+              <a:t>01.07.2026</a:t>
             </a:fld>
             <a:endParaRPr lang="ru-RU"/>
           </a:p>
@@ -1225,7 +1225,7 @@
             <a:fld id="{85A5DE44-605B-4D3B-B2B7-94543DF81A36}" type="datetimeFigureOut">
               <a:rPr lang="ru-RU" smtClean="0"/>
               <a:pPr/>
-              <a:t>10.11.2024</a:t>
+              <a:t>01.07.2026</a:t>
             </a:fld>
             <a:endParaRPr lang="ru-RU"/>
           </a:p>
@@ -1473,7 +1473,7 @@
             <a:fld id="{85A5DE44-605B-4D3B-B2B7-94543DF81A36}" type="datetimeFigureOut">
               <a:rPr lang="ru-RU" smtClean="0"/>
               <a:pPr/>
-              <a:t>10.11.2024</a:t>
+              <a:t>01.07.2026</a:t>
             </a:fld>
             <a:endParaRPr lang="ru-RU"/>
           </a:p>
@@ -1707,7 +1707,7 @@
             <a:fld id="{85A5DE44-605B-4D3B-B2B7-94543DF81A36}" type="datetimeFigureOut">
               <a:rPr lang="ru-RU" smtClean="0"/>
               <a:pPr/>
-              <a:t>10.11.2024</a:t>
+              <a:t>01.07.2026</a:t>
             </a:fld>
             <a:endParaRPr lang="ru-RU"/>
           </a:p>
@@ -2076,7 +2076,7 @@
             <a:fld id="{85A5DE44-605B-4D3B-B2B7-94543DF81A36}" type="datetimeFigureOut">
               <a:rPr lang="ru-RU" smtClean="0"/>
               <a:pPr/>
-              <a:t>10.11.2024</a:t>
+              <a:t>01.07.2026</a:t>
             </a:fld>
             <a:endParaRPr lang="ru-RU"/>
           </a:p>
@@ -2196,7 +2196,7 @@
             <a:fld id="{85A5DE44-605B-4D3B-B2B7-94543DF81A36}" type="datetimeFigureOut">
               <a:rPr lang="ru-RU" smtClean="0"/>
               <a:pPr/>
-              <a:t>10.11.2024</a:t>
+              <a:t>01.07.2026</a:t>
             </a:fld>
             <a:endParaRPr lang="ru-RU"/>
           </a:p>
@@ -2293,7 +2293,7 @@
             <a:fld id="{85A5DE44-605B-4D3B-B2B7-94543DF81A36}" type="datetimeFigureOut">
               <a:rPr lang="ru-RU" smtClean="0"/>
               <a:pPr/>
-              <a:t>10.11.2024</a:t>
+              <a:t>01.07.2026</a:t>
             </a:fld>
             <a:endParaRPr lang="ru-RU"/>
           </a:p>
@@ -2572,7 +2572,7 @@
             <a:fld id="{85A5DE44-605B-4D3B-B2B7-94543DF81A36}" type="datetimeFigureOut">
               <a:rPr lang="ru-RU" smtClean="0"/>
               <a:pPr/>
-              <a:t>10.11.2024</a:t>
+              <a:t>01.07.2026</a:t>
             </a:fld>
             <a:endParaRPr lang="ru-RU"/>
           </a:p>
@@ -2831,7 +2831,7 @@
             <a:fld id="{85A5DE44-605B-4D3B-B2B7-94543DF81A36}" type="datetimeFigureOut">
               <a:rPr lang="ru-RU" smtClean="0"/>
               <a:pPr/>
-              <a:t>10.11.2024</a:t>
+              <a:t>01.07.2026</a:t>
             </a:fld>
             <a:endParaRPr lang="ru-RU"/>
           </a:p>
@@ -3046,7 +3046,7 @@
             <a:fld id="{85A5DE44-605B-4D3B-B2B7-94543DF81A36}" type="datetimeFigureOut">
               <a:rPr lang="ru-RU" smtClean="0"/>
               <a:pPr/>
-              <a:t>10.11.2024</a:t>
+              <a:t>01.07.2026</a:t>
             </a:fld>
             <a:endParaRPr lang="ru-RU"/>
           </a:p>
@@ -3551,7 +3551,7 @@
         </p:nvCxnSpPr>
         <p:spPr>
           <a:xfrm rot="5400000">
-            <a:off x="27239229" y="12114903"/>
+            <a:off x="27239229" y="12890411"/>
             <a:ext cx="224693" cy="2352457"/>
           </a:xfrm>
           <a:prstGeom prst="bentConnector3">
@@ -3590,7 +3590,7 @@
         </p:nvCxnSpPr>
         <p:spPr>
           <a:xfrm flipH="1">
-            <a:off x="26172042" y="13943478"/>
+            <a:off x="26172042" y="14718986"/>
             <a:ext cx="3304" cy="229689"/>
           </a:xfrm>
           <a:prstGeom prst="straightConnector1">
@@ -3668,7 +3668,7 @@
         </p:nvSpPr>
         <p:spPr>
           <a:xfrm>
-            <a:off x="28064640" y="12638785"/>
+            <a:off x="28064640" y="13414293"/>
             <a:ext cx="926325" cy="540000"/>
           </a:xfrm>
           <a:prstGeom prst="rect">
@@ -3734,7 +3734,7 @@
         </p:nvSpPr>
         <p:spPr>
           <a:xfrm>
-            <a:off x="30417092" y="13399145"/>
+            <a:off x="30417092" y="14174653"/>
             <a:ext cx="926325" cy="540000"/>
           </a:xfrm>
           <a:prstGeom prst="rect">
@@ -3827,7 +3827,7 @@
         </p:nvSpPr>
         <p:spPr>
           <a:xfrm>
-            <a:off x="30806733" y="15565350"/>
+            <a:off x="30806733" y="16340858"/>
             <a:ext cx="2221709" cy="1119741"/>
           </a:xfrm>
           <a:prstGeom prst="rect">
@@ -3960,7 +3960,7 @@
         </p:nvSpPr>
         <p:spPr>
           <a:xfrm>
-            <a:off x="26300297" y="14930157"/>
+            <a:off x="26300297" y="15705665"/>
             <a:ext cx="926325" cy="540000"/>
           </a:xfrm>
           <a:prstGeom prst="rect">
@@ -4013,7 +4013,7 @@
         </p:nvSpPr>
         <p:spPr>
           <a:xfrm>
-            <a:off x="26888411" y="13400774"/>
+            <a:off x="26888411" y="14176282"/>
             <a:ext cx="926325" cy="540000"/>
           </a:xfrm>
           <a:prstGeom prst="rect">
@@ -4079,7 +4079,7 @@
         </p:nvSpPr>
         <p:spPr>
           <a:xfrm>
-            <a:off x="24535956" y="14160259"/>
+            <a:off x="24535956" y="14935767"/>
             <a:ext cx="926325" cy="540000"/>
           </a:xfrm>
           <a:prstGeom prst="rect">
@@ -4160,7 +4160,7 @@
         </p:nvSpPr>
         <p:spPr>
           <a:xfrm>
-            <a:off x="25712183" y="13403478"/>
+            <a:off x="25712183" y="14178986"/>
             <a:ext cx="926325" cy="540000"/>
           </a:xfrm>
           <a:prstGeom prst="rect">
@@ -4238,7 +4238,7 @@
         </p:nvSpPr>
         <p:spPr>
           <a:xfrm>
-            <a:off x="28064639" y="13403478"/>
+            <a:off x="28064639" y="14178986"/>
             <a:ext cx="926325" cy="540000"/>
           </a:xfrm>
           <a:prstGeom prst="rect">
@@ -4304,7 +4304,7 @@
         </p:nvSpPr>
         <p:spPr>
           <a:xfrm>
-            <a:off x="27476525" y="14930158"/>
+            <a:off x="27476525" y="15705666"/>
             <a:ext cx="926325" cy="540000"/>
           </a:xfrm>
           <a:prstGeom prst="rect">
@@ -4373,7 +4373,7 @@
         </p:nvSpPr>
         <p:spPr>
           <a:xfrm>
-            <a:off x="26888411" y="14166818"/>
+            <a:off x="26888411" y="14942326"/>
             <a:ext cx="926325" cy="540000"/>
           </a:xfrm>
           <a:prstGeom prst="rect">
@@ -4426,7 +4426,7 @@
         </p:nvSpPr>
         <p:spPr>
           <a:xfrm>
-            <a:off x="28064638" y="14166542"/>
+            <a:off x="28064638" y="14942050"/>
             <a:ext cx="926325" cy="540000"/>
           </a:xfrm>
           <a:prstGeom prst="rect">
@@ -4479,7 +4479,7 @@
         </p:nvSpPr>
         <p:spPr>
           <a:xfrm>
-            <a:off x="29244170" y="14166542"/>
+            <a:off x="29244170" y="14942050"/>
             <a:ext cx="926325" cy="540000"/>
           </a:xfrm>
           <a:prstGeom prst="rect">
@@ -4540,7 +4540,7 @@
         </p:nvSpPr>
         <p:spPr>
           <a:xfrm>
-            <a:off x="29245624" y="15694850"/>
+            <a:off x="29245624" y="16470358"/>
             <a:ext cx="926325" cy="540000"/>
           </a:xfrm>
           <a:prstGeom prst="rect">
@@ -4598,7 +4598,7 @@
         </p:nvSpPr>
         <p:spPr>
           <a:xfrm>
-            <a:off x="28064638" y="15694851"/>
+            <a:off x="28064638" y="16470359"/>
             <a:ext cx="926325" cy="540000"/>
           </a:xfrm>
           <a:prstGeom prst="rect">
@@ -4655,7 +4655,7 @@
         </p:nvCxnSpPr>
         <p:spPr>
           <a:xfrm rot="5400000">
-            <a:off x="27828695" y="12701665"/>
+            <a:off x="27828695" y="13477173"/>
             <a:ext cx="221989" cy="1176229"/>
           </a:xfrm>
           <a:prstGeom prst="bentConnector3">
@@ -4700,7 +4700,7 @@
         </p:nvCxnSpPr>
         <p:spPr>
           <a:xfrm rot="16200000" flipH="1">
-            <a:off x="29005736" y="12700851"/>
+            <a:off x="29005736" y="13476359"/>
             <a:ext cx="220360" cy="1176227"/>
           </a:xfrm>
           <a:prstGeom prst="bentConnector3">
@@ -4745,7 +4745,7 @@
         </p:nvCxnSpPr>
         <p:spPr>
           <a:xfrm flipH="1">
-            <a:off x="28527802" y="13178785"/>
+            <a:off x="28527802" y="13954293"/>
             <a:ext cx="1" cy="224693"/>
           </a:xfrm>
           <a:prstGeom prst="straightConnector1">
@@ -4788,7 +4788,7 @@
         </p:nvCxnSpPr>
         <p:spPr>
           <a:xfrm rot="5400000">
-            <a:off x="27828018" y="13467034"/>
+            <a:off x="27828018" y="14242542"/>
             <a:ext cx="223340" cy="1176228"/>
           </a:xfrm>
           <a:prstGeom prst="bentConnector3">
@@ -4833,7 +4833,7 @@
         </p:nvCxnSpPr>
         <p:spPr>
           <a:xfrm rot="16200000" flipH="1">
-            <a:off x="29006035" y="13465244"/>
+            <a:off x="29006035" y="14240752"/>
             <a:ext cx="223064" cy="1179531"/>
           </a:xfrm>
           <a:prstGeom prst="bentConnector3">
@@ -4878,7 +4878,7 @@
         </p:nvCxnSpPr>
         <p:spPr>
           <a:xfrm flipH="1">
-            <a:off x="28527801" y="13943478"/>
+            <a:off x="28527801" y="14718986"/>
             <a:ext cx="1" cy="223064"/>
           </a:xfrm>
           <a:prstGeom prst="straightConnector1">
@@ -4921,7 +4921,7 @@
         </p:nvCxnSpPr>
         <p:spPr>
           <a:xfrm rot="5400000">
-            <a:off x="27740405" y="14142761"/>
+            <a:off x="27740405" y="14918269"/>
             <a:ext cx="986680" cy="588114"/>
           </a:xfrm>
           <a:prstGeom prst="bentConnector3">
@@ -4966,7 +4966,7 @@
         </p:nvCxnSpPr>
         <p:spPr>
           <a:xfrm rot="16200000" flipH="1">
-            <a:off x="28121398" y="15288447"/>
+            <a:off x="28121398" y="16063955"/>
             <a:ext cx="224693" cy="588113"/>
           </a:xfrm>
           <a:prstGeom prst="bentConnector3">
@@ -5011,7 +5011,7 @@
         </p:nvCxnSpPr>
         <p:spPr>
           <a:xfrm rot="5400000">
-            <a:off x="27533285" y="15288447"/>
+            <a:off x="27533285" y="16063955"/>
             <a:ext cx="224693" cy="588114"/>
           </a:xfrm>
           <a:prstGeom prst="bentConnector3">
@@ -5052,7 +5052,7 @@
         </p:nvSpPr>
         <p:spPr>
           <a:xfrm>
-            <a:off x="25708879" y="14173167"/>
+            <a:off x="25708879" y="14948675"/>
             <a:ext cx="926325" cy="540000"/>
           </a:xfrm>
           <a:prstGeom prst="rect">
@@ -5113,7 +5113,7 @@
         </p:nvSpPr>
         <p:spPr>
           <a:xfrm>
-            <a:off x="26888411" y="15694851"/>
+            <a:off x="26888411" y="16470359"/>
             <a:ext cx="926325" cy="540000"/>
           </a:xfrm>
           <a:prstGeom prst="rect">
@@ -5214,7 +5214,7 @@
         </p:nvCxnSpPr>
         <p:spPr>
           <a:xfrm rot="5400000">
-            <a:off x="26945848" y="14524430"/>
+            <a:off x="26945848" y="15299938"/>
             <a:ext cx="223339" cy="588114"/>
           </a:xfrm>
           <a:prstGeom prst="bentConnector3">
@@ -5259,7 +5259,7 @@
         </p:nvCxnSpPr>
         <p:spPr>
           <a:xfrm>
-            <a:off x="27351574" y="14706818"/>
+            <a:off x="27351574" y="15482326"/>
             <a:ext cx="0" cy="988033"/>
           </a:xfrm>
           <a:prstGeom prst="straightConnector1">
@@ -5298,7 +5298,7 @@
         </p:nvSpPr>
         <p:spPr>
           <a:xfrm>
-            <a:off x="28656056" y="14927454"/>
+            <a:off x="28656056" y="15702962"/>
             <a:ext cx="926325" cy="540000"/>
           </a:xfrm>
           <a:prstGeom prst="rect">
@@ -5387,7 +5387,7 @@
         </p:nvCxnSpPr>
         <p:spPr>
           <a:xfrm rot="16200000" flipH="1">
-            <a:off x="28713054" y="14521289"/>
+            <a:off x="28713054" y="15296797"/>
             <a:ext cx="220912" cy="591418"/>
           </a:xfrm>
           <a:prstGeom prst="bentConnector3">
@@ -5432,7 +5432,7 @@
         </p:nvCxnSpPr>
         <p:spPr>
           <a:xfrm rot="5400000">
-            <a:off x="29302820" y="14522941"/>
+            <a:off x="29302820" y="15298449"/>
             <a:ext cx="220912" cy="588114"/>
           </a:xfrm>
           <a:prstGeom prst="bentConnector3">
@@ -5477,7 +5477,7 @@
         </p:nvCxnSpPr>
         <p:spPr>
           <a:xfrm rot="5400000">
-            <a:off x="25478843" y="13463755"/>
+            <a:off x="25478843" y="14239263"/>
             <a:ext cx="216781" cy="1176227"/>
           </a:xfrm>
           <a:prstGeom prst="bentConnector3">
@@ -5518,7 +5518,7 @@
         </p:nvSpPr>
         <p:spPr>
           <a:xfrm>
-            <a:off x="31593317" y="13399145"/>
+            <a:off x="31593317" y="14174653"/>
             <a:ext cx="926325" cy="540000"/>
           </a:xfrm>
           <a:prstGeom prst="rect">
@@ -5952,7 +5952,7 @@
         </p:nvSpPr>
         <p:spPr>
           <a:xfrm>
-            <a:off x="29240867" y="13399145"/>
+            <a:off x="29240867" y="14174653"/>
             <a:ext cx="926325" cy="540000"/>
           </a:xfrm>
           <a:prstGeom prst="rect">
@@ -6010,7 +6010,7 @@
         </p:nvSpPr>
         <p:spPr>
           <a:xfrm>
-            <a:off x="25708879" y="15701040"/>
+            <a:off x="25708879" y="16476548"/>
             <a:ext cx="926325" cy="540000"/>
           </a:xfrm>
           <a:prstGeom prst="rect">
@@ -6068,7 +6068,7 @@
         </p:nvSpPr>
         <p:spPr>
           <a:xfrm>
-            <a:off x="33298703" y="14795437"/>
+            <a:off x="33298703" y="15570945"/>
             <a:ext cx="926325" cy="540000"/>
           </a:xfrm>
           <a:prstGeom prst="rect">
@@ -6129,7 +6129,7 @@
         </p:nvSpPr>
         <p:spPr>
           <a:xfrm>
-            <a:off x="31012638" y="14166542"/>
+            <a:off x="31012638" y="14942050"/>
             <a:ext cx="926325" cy="540000"/>
           </a:xfrm>
           <a:prstGeom prst="rect">
@@ -6186,7 +6186,7 @@
         </p:nvCxnSpPr>
         <p:spPr>
           <a:xfrm rot="16200000" flipH="1">
-            <a:off x="25172712" y="14526666"/>
+            <a:off x="25172712" y="15302174"/>
             <a:ext cx="235972" cy="583158"/>
           </a:xfrm>
           <a:prstGeom prst="bentConnector3">
@@ -6231,7 +6231,7 @@
         </p:nvCxnSpPr>
         <p:spPr>
           <a:xfrm rot="5400000">
-            <a:off x="31652443" y="13762504"/>
+            <a:off x="31652443" y="14538012"/>
             <a:ext cx="227397" cy="580679"/>
           </a:xfrm>
           <a:prstGeom prst="bentConnector3">
@@ -6277,7 +6277,7 @@
         </p:nvCxnSpPr>
         <p:spPr>
           <a:xfrm rot="16200000" flipH="1">
-            <a:off x="31064330" y="13755070"/>
+            <a:off x="31064330" y="14530578"/>
             <a:ext cx="227397" cy="595546"/>
           </a:xfrm>
           <a:prstGeom prst="bentConnector3">
@@ -6323,7 +6323,7 @@
         </p:nvCxnSpPr>
         <p:spPr>
           <a:xfrm rot="16200000" flipH="1">
-            <a:off x="29593849" y="12112739"/>
+            <a:off x="29593849" y="12888247"/>
             <a:ext cx="220360" cy="2352452"/>
           </a:xfrm>
           <a:prstGeom prst="bentConnector3">
@@ -6368,7 +6368,7 @@
         </p:nvCxnSpPr>
         <p:spPr>
           <a:xfrm rot="16200000" flipH="1">
-            <a:off x="30181961" y="11524626"/>
+            <a:off x="30181961" y="12300134"/>
             <a:ext cx="220360" cy="3528677"/>
           </a:xfrm>
           <a:prstGeom prst="bentConnector3">
@@ -6409,7 +6409,7 @@
         </p:nvSpPr>
         <p:spPr>
           <a:xfrm>
-            <a:off x="31012638" y="14927454"/>
+            <a:off x="31012638" y="15702962"/>
             <a:ext cx="926325" cy="540000"/>
           </a:xfrm>
           <a:prstGeom prst="rect">
@@ -6466,7 +6466,7 @@
         </p:nvCxnSpPr>
         <p:spPr>
           <a:xfrm>
-            <a:off x="29707333" y="14706542"/>
+            <a:off x="29707333" y="15482050"/>
             <a:ext cx="1454" cy="988308"/>
           </a:xfrm>
           <a:prstGeom prst="straightConnector1">
@@ -6509,7 +6509,7 @@
         </p:nvCxnSpPr>
         <p:spPr>
           <a:xfrm>
-            <a:off x="31475801" y="14706542"/>
+            <a:off x="31475801" y="15482050"/>
             <a:ext cx="0" cy="220912"/>
           </a:xfrm>
           <a:prstGeom prst="straightConnector1">
@@ -6552,7 +6552,7 @@
         </p:nvCxnSpPr>
         <p:spPr>
           <a:xfrm>
-            <a:off x="26172042" y="14713167"/>
+            <a:off x="26172042" y="15488675"/>
             <a:ext cx="0" cy="987873"/>
           </a:xfrm>
           <a:prstGeom prst="straightConnector1">
@@ -6591,7 +6591,7 @@
         </p:nvSpPr>
         <p:spPr>
           <a:xfrm>
-            <a:off x="25119114" y="14936231"/>
+            <a:off x="25119114" y="15711739"/>
             <a:ext cx="926325" cy="540000"/>
           </a:xfrm>
           <a:prstGeom prst="rect">
@@ -6689,7 +6689,7 @@
         </p:nvSpPr>
         <p:spPr>
           <a:xfrm>
-            <a:off x="33515268" y="15556349"/>
+            <a:off x="33515268" y="16331857"/>
             <a:ext cx="2461934" cy="1119741"/>
           </a:xfrm>
           <a:prstGeom prst="rect">
@@ -6776,7 +6776,7 @@
         </p:nvSpPr>
         <p:spPr>
           <a:xfrm>
-            <a:off x="11867953" y="20771659"/>
+            <a:off x="11867953" y="28250141"/>
             <a:ext cx="926325" cy="540000"/>
           </a:xfrm>
           <a:prstGeom prst="rect">
@@ -7402,7 +7402,7 @@
         </p:nvSpPr>
         <p:spPr>
           <a:xfrm>
-            <a:off x="23377360" y="11824924"/>
+            <a:off x="23377360" y="12632616"/>
             <a:ext cx="926325" cy="540000"/>
           </a:xfrm>
           <a:prstGeom prst="rect">
@@ -8371,8 +8371,8 @@
         </p:nvCxnSpPr>
         <p:spPr>
           <a:xfrm rot="16200000" flipH="1">
-            <a:off x="26047233" y="10158214"/>
-            <a:ext cx="273861" cy="4687280"/>
+            <a:off x="26063325" y="10949814"/>
+            <a:ext cx="241677" cy="4687280"/>
           </a:xfrm>
           <a:prstGeom prst="bentConnector3">
             <a:avLst>
@@ -8761,7 +8761,7 @@
         </p:nvSpPr>
         <p:spPr>
           <a:xfrm>
-            <a:off x="22402280" y="20620650"/>
+            <a:off x="22402280" y="28099132"/>
             <a:ext cx="926325" cy="540000"/>
           </a:xfrm>
           <a:prstGeom prst="rect">
@@ -8966,12 +8966,12 @@
         </p:nvCxnSpPr>
         <p:spPr>
           <a:xfrm rot="16200000" flipH="1">
-            <a:off x="21847905" y="9832306"/>
-            <a:ext cx="2790460" cy="1194776"/>
+            <a:off x="21444059" y="10236152"/>
+            <a:ext cx="3598152" cy="1194776"/>
           </a:xfrm>
           <a:prstGeom prst="bentConnector3">
             <a:avLst>
-              <a:gd name="adj1" fmla="val 4260"/>
+              <a:gd name="adj1" fmla="val 50000"/>
             </a:avLst>
           </a:prstGeom>
           <a:ln w="19050">
@@ -9012,12 +9012,12 @@
         </p:nvCxnSpPr>
         <p:spPr>
           <a:xfrm rot="5400000">
-            <a:off x="22734030" y="10146168"/>
-            <a:ext cx="2785250" cy="572263"/>
+            <a:off x="22330184" y="10550014"/>
+            <a:ext cx="3592942" cy="572263"/>
           </a:xfrm>
           <a:prstGeom prst="bentConnector3">
             <a:avLst>
-              <a:gd name="adj1" fmla="val 4038"/>
+              <a:gd name="adj1" fmla="val 50000"/>
             </a:avLst>
           </a:prstGeom>
           <a:ln w="19050">
@@ -9054,7 +9054,7 @@
         </p:nvSpPr>
         <p:spPr>
           <a:xfrm>
-            <a:off x="25889910" y="23154066"/>
+            <a:off x="25889910" y="30632548"/>
             <a:ext cx="926325" cy="540000"/>
           </a:xfrm>
           <a:prstGeom prst="rect">
@@ -9110,7 +9110,7 @@
         </p:nvSpPr>
         <p:spPr>
           <a:xfrm>
-            <a:off x="20595217" y="18331630"/>
+            <a:off x="20595217" y="25810112"/>
             <a:ext cx="926325" cy="540000"/>
           </a:xfrm>
           <a:prstGeom prst="rect">
@@ -9161,7 +9161,7 @@
         </p:nvSpPr>
         <p:spPr>
           <a:xfrm>
-            <a:off x="24151488" y="19825398"/>
+            <a:off x="24151488" y="27303880"/>
             <a:ext cx="926325" cy="540000"/>
           </a:xfrm>
           <a:prstGeom prst="rect">
@@ -9215,7 +9215,7 @@
         </p:nvSpPr>
         <p:spPr>
           <a:xfrm>
-            <a:off x="27023802" y="19823700"/>
+            <a:off x="27023802" y="27302182"/>
             <a:ext cx="926325" cy="540000"/>
           </a:xfrm>
           <a:prstGeom prst="rect">
@@ -9330,7 +9330,7 @@
         </p:nvSpPr>
         <p:spPr>
           <a:xfrm>
-            <a:off x="29438739" y="21469878"/>
+            <a:off x="29438739" y="28948360"/>
             <a:ext cx="926325" cy="540000"/>
           </a:xfrm>
           <a:prstGeom prst="rect">
@@ -9384,7 +9384,7 @@
         </p:nvSpPr>
         <p:spPr>
           <a:xfrm>
-            <a:off x="29438739" y="22341944"/>
+            <a:off x="29438739" y="29820426"/>
             <a:ext cx="926325" cy="540000"/>
           </a:xfrm>
           <a:prstGeom prst="rect">
@@ -9439,7 +9439,7 @@
         </p:nvSpPr>
         <p:spPr>
           <a:xfrm>
-            <a:off x="30649078" y="22341944"/>
+            <a:off x="30649078" y="29820426"/>
             <a:ext cx="926325" cy="540000"/>
           </a:xfrm>
           <a:prstGeom prst="rect">
@@ -9498,7 +9498,7 @@
         </p:nvSpPr>
         <p:spPr>
           <a:xfrm>
-            <a:off x="30649077" y="21476185"/>
+            <a:off x="30649077" y="28954667"/>
             <a:ext cx="926325" cy="540000"/>
           </a:xfrm>
           <a:prstGeom prst="rect">
@@ -9556,7 +9556,7 @@
         </p:nvCxnSpPr>
         <p:spPr>
           <a:xfrm flipV="1">
-            <a:off x="25674165" y="21751298"/>
+            <a:off x="25674165" y="29229780"/>
             <a:ext cx="1349637" cy="1619"/>
           </a:xfrm>
           <a:prstGeom prst="line">
@@ -9601,7 +9601,7 @@
         </p:nvCxnSpPr>
         <p:spPr>
           <a:xfrm rot="16200000" flipH="1">
-            <a:off x="24170427" y="16507161"/>
+            <a:off x="24170427" y="23985643"/>
             <a:ext cx="204491" cy="6428586"/>
           </a:xfrm>
           <a:prstGeom prst="bentConnector3">
@@ -9646,7 +9646,7 @@
         </p:nvCxnSpPr>
         <p:spPr>
           <a:xfrm>
-            <a:off x="31112240" y="22016185"/>
+            <a:off x="31112240" y="29494667"/>
             <a:ext cx="1" cy="325759"/>
           </a:xfrm>
           <a:prstGeom prst="straightConnector1">
@@ -9689,7 +9689,7 @@
         </p:nvCxnSpPr>
         <p:spPr>
           <a:xfrm>
-            <a:off x="29901902" y="22009878"/>
+            <a:off x="29901902" y="29488360"/>
             <a:ext cx="0" cy="332066"/>
           </a:xfrm>
           <a:prstGeom prst="straightConnector1">
@@ -9728,7 +9728,7 @@
         </p:nvSpPr>
         <p:spPr>
           <a:xfrm>
-            <a:off x="30649077" y="23151944"/>
+            <a:off x="30649077" y="30630426"/>
             <a:ext cx="926325" cy="540000"/>
           </a:xfrm>
           <a:prstGeom prst="rect">
@@ -9802,7 +9802,7 @@
         </p:nvCxnSpPr>
         <p:spPr>
           <a:xfrm flipH="1">
-            <a:off x="31112240" y="22881944"/>
+            <a:off x="31112240" y="30360426"/>
             <a:ext cx="1" cy="270000"/>
           </a:xfrm>
           <a:prstGeom prst="straightConnector1">
@@ -9841,7 +9841,7 @@
         </p:nvSpPr>
         <p:spPr>
           <a:xfrm>
-            <a:off x="31243110" y="23957387"/>
+            <a:off x="31243110" y="31435869"/>
             <a:ext cx="926325" cy="540000"/>
           </a:xfrm>
           <a:prstGeom prst="rect">
@@ -9904,7 +9904,7 @@
         </p:nvCxnSpPr>
         <p:spPr>
           <a:xfrm rot="5400000">
-            <a:off x="31252860" y="19802484"/>
+            <a:off x="31252860" y="27280966"/>
             <a:ext cx="316436" cy="3018352"/>
           </a:xfrm>
           <a:prstGeom prst="bentConnector3">
@@ -9945,7 +9945,7 @@
         </p:nvSpPr>
         <p:spPr>
           <a:xfrm>
-            <a:off x="28831606" y="23957387"/>
+            <a:off x="28831606" y="31435869"/>
             <a:ext cx="926325" cy="540000"/>
           </a:xfrm>
           <a:prstGeom prst="rect">
@@ -10004,7 +10004,7 @@
         </p:nvCxnSpPr>
         <p:spPr>
           <a:xfrm rot="5400000">
-            <a:off x="29060615" y="23116099"/>
+            <a:off x="29060615" y="30594581"/>
             <a:ext cx="1075443" cy="607133"/>
           </a:xfrm>
           <a:prstGeom prst="bentConnector3">
@@ -10049,7 +10049,7 @@
         </p:nvCxnSpPr>
         <p:spPr>
           <a:xfrm>
-            <a:off x="29757931" y="24227387"/>
+            <a:off x="29757931" y="31705869"/>
             <a:ext cx="1485179" cy="0"/>
           </a:xfrm>
           <a:prstGeom prst="line">
@@ -10090,7 +10090,7 @@
         </p:nvSpPr>
         <p:spPr>
           <a:xfrm>
-            <a:off x="28831606" y="24767387"/>
+            <a:off x="28831606" y="32245869"/>
             <a:ext cx="926325" cy="540000"/>
           </a:xfrm>
           <a:prstGeom prst="rect">
@@ -10157,7 +10157,7 @@
         </p:nvCxnSpPr>
         <p:spPr>
           <a:xfrm>
-            <a:off x="29294769" y="24497387"/>
+            <a:off x="29294769" y="31975869"/>
             <a:ext cx="0" cy="270000"/>
           </a:xfrm>
           <a:prstGeom prst="straightConnector1">
@@ -10196,7 +10196,7 @@
         </p:nvSpPr>
         <p:spPr>
           <a:xfrm>
-            <a:off x="32457091" y="21470830"/>
+            <a:off x="32457091" y="28949312"/>
             <a:ext cx="926325" cy="540000"/>
           </a:xfrm>
           <a:prstGeom prst="rect">
@@ -10250,7 +10250,7 @@
         </p:nvSpPr>
         <p:spPr>
           <a:xfrm>
-            <a:off x="31855672" y="23151943"/>
+            <a:off x="31855672" y="30630425"/>
             <a:ext cx="926325" cy="540000"/>
           </a:xfrm>
           <a:prstGeom prst="rect">
@@ -10305,7 +10305,7 @@
         </p:nvSpPr>
         <p:spPr>
           <a:xfrm>
-            <a:off x="33063342" y="22341944"/>
+            <a:off x="33063342" y="29820426"/>
             <a:ext cx="926325" cy="540000"/>
           </a:xfrm>
           <a:prstGeom prst="rect">
@@ -10360,7 +10360,7 @@
         </p:nvSpPr>
         <p:spPr>
           <a:xfrm>
-            <a:off x="32457091" y="20613442"/>
+            <a:off x="32457091" y="28091924"/>
             <a:ext cx="926325" cy="540000"/>
           </a:xfrm>
           <a:prstGeom prst="rect">
@@ -10418,7 +10418,7 @@
         </p:nvSpPr>
         <p:spPr>
           <a:xfrm>
-            <a:off x="31855671" y="22341944"/>
+            <a:off x="31855671" y="29820426"/>
             <a:ext cx="926325" cy="540000"/>
           </a:xfrm>
           <a:prstGeom prst="rect">
@@ -10485,7 +10485,7 @@
         </p:nvCxnSpPr>
         <p:spPr>
           <a:xfrm rot="16200000" flipH="1">
-            <a:off x="33057822" y="21873261"/>
+            <a:off x="33057822" y="29351743"/>
             <a:ext cx="331114" cy="606251"/>
           </a:xfrm>
           <a:prstGeom prst="bentConnector3">
@@ -10530,7 +10530,7 @@
         </p:nvCxnSpPr>
         <p:spPr>
           <a:xfrm>
-            <a:off x="32318834" y="22881944"/>
+            <a:off x="32318834" y="30360426"/>
             <a:ext cx="1" cy="269999"/>
           </a:xfrm>
           <a:prstGeom prst="straightConnector1">
@@ -10569,7 +10569,7 @@
         </p:nvSpPr>
         <p:spPr>
           <a:xfrm>
-            <a:off x="33062265" y="23151943"/>
+            <a:off x="33062265" y="30630425"/>
             <a:ext cx="926325" cy="540000"/>
           </a:xfrm>
           <a:prstGeom prst="rect">
@@ -10640,7 +10640,7 @@
         </p:nvCxnSpPr>
         <p:spPr>
           <a:xfrm rot="16200000" flipH="1">
-            <a:off x="32787132" y="22413646"/>
+            <a:off x="32787132" y="29892128"/>
             <a:ext cx="269999" cy="1206594"/>
           </a:xfrm>
           <a:prstGeom prst="bentConnector3">
@@ -10685,7 +10685,7 @@
         </p:nvCxnSpPr>
         <p:spPr>
           <a:xfrm>
-            <a:off x="32169435" y="24227387"/>
+            <a:off x="32169435" y="31705869"/>
             <a:ext cx="1504778" cy="0"/>
           </a:xfrm>
           <a:prstGeom prst="line">
@@ -10726,7 +10726,7 @@
         </p:nvSpPr>
         <p:spPr>
           <a:xfrm>
-            <a:off x="33674213" y="23957387"/>
+            <a:off x="33674213" y="31435869"/>
             <a:ext cx="926325" cy="540000"/>
           </a:xfrm>
           <a:prstGeom prst="rect">
@@ -10788,7 +10788,7 @@
         </p:nvCxnSpPr>
         <p:spPr>
           <a:xfrm rot="5400000">
-            <a:off x="33390968" y="23016405"/>
+            <a:off x="33390968" y="30494887"/>
             <a:ext cx="269999" cy="1077"/>
           </a:xfrm>
           <a:prstGeom prst="bentConnector3">
@@ -10829,7 +10829,7 @@
         </p:nvSpPr>
         <p:spPr>
           <a:xfrm>
-            <a:off x="34267594" y="22341944"/>
+            <a:off x="34267594" y="29820426"/>
             <a:ext cx="926325" cy="540000"/>
           </a:xfrm>
           <a:prstGeom prst="rect">
@@ -10887,7 +10887,7 @@
         </p:nvCxnSpPr>
         <p:spPr>
           <a:xfrm rot="16200000" flipH="1">
-            <a:off x="33231254" y="20842441"/>
+            <a:off x="33231254" y="28320923"/>
             <a:ext cx="1188502" cy="1810503"/>
           </a:xfrm>
           <a:prstGeom prst="bentConnector3">
@@ -10928,7 +10928,7 @@
         </p:nvSpPr>
         <p:spPr>
           <a:xfrm>
-            <a:off x="34267593" y="23151943"/>
+            <a:off x="34267593" y="30630425"/>
             <a:ext cx="926325" cy="540000"/>
           </a:xfrm>
           <a:prstGeom prst="rect">
@@ -10986,7 +10986,7 @@
         </p:nvCxnSpPr>
         <p:spPr>
           <a:xfrm flipH="1">
-            <a:off x="34730756" y="22881944"/>
+            <a:off x="34730756" y="30360426"/>
             <a:ext cx="1" cy="269999"/>
           </a:xfrm>
           <a:prstGeom prst="straightConnector1">
@@ -11029,7 +11029,7 @@
         </p:nvCxnSpPr>
         <p:spPr>
           <a:xfrm rot="5400000">
-            <a:off x="32453987" y="21875677"/>
+            <a:off x="32453987" y="29354159"/>
             <a:ext cx="331114" cy="601420"/>
           </a:xfrm>
           <a:prstGeom prst="bentConnector3">
@@ -11074,7 +11074,7 @@
         </p:nvCxnSpPr>
         <p:spPr>
           <a:xfrm rot="16200000" flipH="1">
-            <a:off x="33294219" y="23114229"/>
+            <a:off x="33294219" y="30592711"/>
             <a:ext cx="1075443" cy="610871"/>
           </a:xfrm>
           <a:prstGeom prst="bentConnector3">
@@ -11119,7 +11119,7 @@
         </p:nvCxnSpPr>
         <p:spPr>
           <a:xfrm rot="16200000" flipH="1">
-            <a:off x="30871536" y="23122649"/>
+            <a:off x="30871536" y="30601131"/>
             <a:ext cx="1075443" cy="594032"/>
           </a:xfrm>
           <a:prstGeom prst="bentConnector3">
@@ -11164,7 +11164,7 @@
         </p:nvCxnSpPr>
         <p:spPr>
           <a:xfrm rot="5400000">
-            <a:off x="31854876" y="20410806"/>
+            <a:off x="31854876" y="27889288"/>
             <a:ext cx="322743" cy="1808014"/>
           </a:xfrm>
           <a:prstGeom prst="bentConnector3">
@@ -11205,7 +11205,7 @@
         </p:nvSpPr>
         <p:spPr>
           <a:xfrm>
-            <a:off x="33669328" y="21469878"/>
+            <a:off x="33669328" y="28948360"/>
             <a:ext cx="926325" cy="540000"/>
           </a:xfrm>
           <a:prstGeom prst="rect">
@@ -11263,7 +11263,7 @@
         </p:nvCxnSpPr>
         <p:spPr>
           <a:xfrm rot="16200000" flipH="1">
-            <a:off x="33368154" y="20705541"/>
+            <a:off x="33368154" y="28184023"/>
             <a:ext cx="316436" cy="1212237"/>
           </a:xfrm>
           <a:prstGeom prst="bentConnector3">
@@ -11304,7 +11304,7 @@
         </p:nvSpPr>
         <p:spPr>
           <a:xfrm>
-            <a:off x="34876999" y="21469878"/>
+            <a:off x="34876999" y="28948360"/>
             <a:ext cx="926325" cy="540000"/>
           </a:xfrm>
           <a:prstGeom prst="rect">
@@ -11353,7 +11353,7 @@
         </p:nvSpPr>
         <p:spPr>
           <a:xfrm>
-            <a:off x="35474189" y="22341943"/>
+            <a:off x="35474189" y="29820425"/>
             <a:ext cx="926325" cy="540000"/>
           </a:xfrm>
           <a:prstGeom prst="rect">
@@ -11406,7 +11406,7 @@
         </p:nvSpPr>
         <p:spPr>
           <a:xfrm>
-            <a:off x="36687346" y="22336292"/>
+            <a:off x="36687346" y="29814774"/>
             <a:ext cx="926325" cy="540000"/>
           </a:xfrm>
           <a:prstGeom prst="rect">
@@ -11455,7 +11455,7 @@
         </p:nvSpPr>
         <p:spPr>
           <a:xfrm>
-            <a:off x="36081252" y="21469878"/>
+            <a:off x="36081252" y="28948360"/>
             <a:ext cx="926325" cy="540000"/>
           </a:xfrm>
           <a:prstGeom prst="rect">
@@ -11504,7 +11504,7 @@
         </p:nvSpPr>
         <p:spPr>
           <a:xfrm>
-            <a:off x="36081252" y="23151943"/>
+            <a:off x="36081252" y="30630425"/>
             <a:ext cx="926325" cy="540000"/>
           </a:xfrm>
           <a:prstGeom prst="rect">
@@ -11557,7 +11557,7 @@
         </p:nvCxnSpPr>
         <p:spPr>
           <a:xfrm rot="16200000" flipH="1">
-            <a:off x="33971990" y="20101706"/>
+            <a:off x="33971990" y="27580188"/>
             <a:ext cx="316436" cy="2419908"/>
           </a:xfrm>
           <a:prstGeom prst="bentConnector3">
@@ -11602,7 +11602,7 @@
         </p:nvCxnSpPr>
         <p:spPr>
           <a:xfrm rot="16200000" flipH="1">
-            <a:off x="34574116" y="19499579"/>
+            <a:off x="34574116" y="26978061"/>
             <a:ext cx="316436" cy="3624161"/>
           </a:xfrm>
           <a:prstGeom prst="bentConnector3">
@@ -11647,7 +11647,7 @@
         </p:nvCxnSpPr>
         <p:spPr>
           <a:xfrm rot="5400000">
-            <a:off x="36074852" y="21872379"/>
+            <a:off x="36074852" y="29350861"/>
             <a:ext cx="332065" cy="607063"/>
           </a:xfrm>
           <a:prstGeom prst="bentConnector3">
@@ -11692,7 +11692,7 @@
         </p:nvCxnSpPr>
         <p:spPr>
           <a:xfrm rot="16200000" flipH="1">
-            <a:off x="36684255" y="21870038"/>
+            <a:off x="36684255" y="29348520"/>
             <a:ext cx="326414" cy="606094"/>
           </a:xfrm>
           <a:prstGeom prst="bentConnector3">
@@ -11737,7 +11737,7 @@
         </p:nvCxnSpPr>
         <p:spPr>
           <a:xfrm>
-            <a:off x="36544415" y="22009878"/>
+            <a:off x="36544415" y="29488360"/>
             <a:ext cx="0" cy="1142065"/>
           </a:xfrm>
           <a:prstGeom prst="straightConnector1">
@@ -11914,7 +11914,7 @@
         </p:nvSpPr>
         <p:spPr>
           <a:xfrm>
-            <a:off x="20595216" y="19079209"/>
+            <a:off x="20595216" y="26557691"/>
             <a:ext cx="926325" cy="540000"/>
           </a:xfrm>
           <a:prstGeom prst="rect">
@@ -12133,7 +12133,7 @@
         </p:nvCxnSpPr>
         <p:spPr>
           <a:xfrm rot="16200000" flipH="1">
-            <a:off x="30078738" y="17771926"/>
+            <a:off x="30078738" y="25250408"/>
             <a:ext cx="249742" cy="5433289"/>
           </a:xfrm>
           <a:prstGeom prst="bentConnector3">
@@ -12174,7 +12174,7 @@
         </p:nvSpPr>
         <p:spPr>
           <a:xfrm>
-            <a:off x="22981294" y="19825398"/>
+            <a:off x="22981294" y="27303880"/>
             <a:ext cx="926325" cy="540000"/>
           </a:xfrm>
           <a:prstGeom prst="rect">
@@ -12228,7 +12228,7 @@
         </p:nvSpPr>
         <p:spPr>
           <a:xfrm>
-            <a:off x="20594752" y="19821422"/>
+            <a:off x="20594752" y="27299904"/>
             <a:ext cx="926325" cy="540000"/>
           </a:xfrm>
           <a:prstGeom prst="rect">
@@ -12286,7 +12286,7 @@
         </p:nvCxnSpPr>
         <p:spPr>
           <a:xfrm flipH="1">
-            <a:off x="21058379" y="18871630"/>
+            <a:off x="21058379" y="26350112"/>
             <a:ext cx="1" cy="207579"/>
           </a:xfrm>
           <a:prstGeom prst="straightConnector1">
@@ -12421,7 +12421,7 @@
         </p:nvSpPr>
         <p:spPr>
           <a:xfrm>
-            <a:off x="25888831" y="20614798"/>
+            <a:off x="25888831" y="28093280"/>
             <a:ext cx="926325" cy="540000"/>
           </a:xfrm>
           <a:prstGeom prst="rect">
@@ -12479,7 +12479,7 @@
         </p:nvCxnSpPr>
         <p:spPr>
           <a:xfrm rot="16200000" flipH="1">
-            <a:off x="22148324" y="18529264"/>
+            <a:off x="22148324" y="26007746"/>
             <a:ext cx="206189" cy="2386078"/>
           </a:xfrm>
           <a:prstGeom prst="bentConnector3">
@@ -12524,7 +12524,7 @@
         </p:nvCxnSpPr>
         <p:spPr>
           <a:xfrm>
-            <a:off x="27486965" y="20363700"/>
+            <a:off x="27486965" y="27842182"/>
             <a:ext cx="0" cy="251774"/>
           </a:xfrm>
           <a:prstGeom prst="straightConnector1">
@@ -12567,7 +12567,7 @@
         </p:nvCxnSpPr>
         <p:spPr>
           <a:xfrm rot="16200000" flipH="1">
-            <a:off x="22733421" y="17944167"/>
+            <a:off x="22733421" y="25422649"/>
             <a:ext cx="206189" cy="3556272"/>
           </a:xfrm>
           <a:prstGeom prst="bentConnector3">
@@ -12612,7 +12612,7 @@
         </p:nvCxnSpPr>
         <p:spPr>
           <a:xfrm flipH="1">
-            <a:off x="21057915" y="19619209"/>
+            <a:off x="21057915" y="27097691"/>
             <a:ext cx="464" cy="202213"/>
           </a:xfrm>
           <a:prstGeom prst="straightConnector1">
@@ -12827,7 +12827,7 @@
         </p:nvCxnSpPr>
         <p:spPr>
           <a:xfrm rot="16200000" flipH="1">
-            <a:off x="21461191" y="19216397"/>
+            <a:off x="21461191" y="26694879"/>
             <a:ext cx="1001441" cy="1807064"/>
           </a:xfrm>
           <a:prstGeom prst="bentConnector3">
@@ -14524,7 +14524,7 @@
         </p:nvSpPr>
         <p:spPr>
           <a:xfrm>
-            <a:off x="22402279" y="21481393"/>
+            <a:off x="22402279" y="28959875"/>
             <a:ext cx="926325" cy="540000"/>
           </a:xfrm>
           <a:prstGeom prst="rect">
@@ -14590,7 +14590,7 @@
         </p:nvCxnSpPr>
         <p:spPr>
           <a:xfrm flipH="1">
-            <a:off x="22865442" y="21160650"/>
+            <a:off x="22865442" y="28639132"/>
             <a:ext cx="1" cy="320743"/>
           </a:xfrm>
           <a:prstGeom prst="straightConnector1">
@@ -14629,7 +14629,7 @@
         </p:nvSpPr>
         <p:spPr>
           <a:xfrm>
-            <a:off x="25298410" y="19825798"/>
+            <a:off x="25298410" y="27304280"/>
             <a:ext cx="926325" cy="540000"/>
           </a:xfrm>
           <a:prstGeom prst="rect">
@@ -16832,7 +16832,7 @@
         </p:nvSpPr>
         <p:spPr>
           <a:xfrm>
-            <a:off x="27023802" y="21481298"/>
+            <a:off x="27023802" y="28959780"/>
             <a:ext cx="926325" cy="540000"/>
           </a:xfrm>
           <a:prstGeom prst="rect">
@@ -16889,7 +16889,7 @@
         </p:nvSpPr>
         <p:spPr>
           <a:xfrm>
-            <a:off x="24747840" y="21482917"/>
+            <a:off x="24747840" y="28961399"/>
             <a:ext cx="926325" cy="540000"/>
           </a:xfrm>
           <a:prstGeom prst="rect">
@@ -16938,7 +16938,7 @@
         </p:nvSpPr>
         <p:spPr>
           <a:xfrm>
-            <a:off x="24747840" y="22345185"/>
+            <a:off x="24747840" y="29823667"/>
             <a:ext cx="926325" cy="540000"/>
           </a:xfrm>
           <a:prstGeom prst="rect">
@@ -16987,7 +16987,7 @@
         </p:nvSpPr>
         <p:spPr>
           <a:xfrm>
-            <a:off x="23543829" y="23148214"/>
+            <a:off x="23543829" y="30626696"/>
             <a:ext cx="926325" cy="540000"/>
           </a:xfrm>
           <a:prstGeom prst="rect">
@@ -17036,7 +17036,7 @@
         </p:nvSpPr>
         <p:spPr>
           <a:xfrm>
-            <a:off x="25888832" y="23957387"/>
+            <a:off x="25888832" y="31435869"/>
             <a:ext cx="926325" cy="540000"/>
           </a:xfrm>
           <a:prstGeom prst="rect">
@@ -17085,7 +17085,7 @@
         </p:nvSpPr>
         <p:spPr>
           <a:xfrm>
-            <a:off x="28222204" y="22348129"/>
+            <a:off x="28222204" y="29826611"/>
             <a:ext cx="926325" cy="540000"/>
           </a:xfrm>
           <a:prstGeom prst="rect">
@@ -17134,7 +17134,7 @@
         </p:nvSpPr>
         <p:spPr>
           <a:xfrm>
-            <a:off x="28225514" y="23148214"/>
+            <a:off x="28225514" y="30626696"/>
             <a:ext cx="926325" cy="540000"/>
           </a:xfrm>
           <a:prstGeom prst="rect">
@@ -17183,7 +17183,7 @@
         </p:nvSpPr>
         <p:spPr>
           <a:xfrm>
-            <a:off x="27023802" y="23149569"/>
+            <a:off x="27023802" y="30628051"/>
             <a:ext cx="926325" cy="540000"/>
           </a:xfrm>
           <a:prstGeom prst="rect">
@@ -17232,7 +17232,7 @@
         </p:nvSpPr>
         <p:spPr>
           <a:xfrm>
-            <a:off x="27023802" y="22336292"/>
+            <a:off x="27023802" y="29814774"/>
             <a:ext cx="926325" cy="540000"/>
           </a:xfrm>
           <a:prstGeom prst="rect">
@@ -17285,7 +17285,7 @@
         </p:nvCxnSpPr>
         <p:spPr>
           <a:xfrm rot="16200000" flipH="1">
-            <a:off x="26756229" y="20750562"/>
+            <a:off x="26756229" y="28229044"/>
             <a:ext cx="326500" cy="1134971"/>
           </a:xfrm>
           <a:prstGeom prst="bentConnector3">
@@ -17330,7 +17330,7 @@
         </p:nvCxnSpPr>
         <p:spPr>
           <a:xfrm rot="5400000">
-            <a:off x="25617440" y="20748362"/>
+            <a:off x="25617440" y="28226844"/>
             <a:ext cx="328119" cy="1140991"/>
           </a:xfrm>
           <a:prstGeom prst="bentConnector3">
@@ -17375,7 +17375,7 @@
         </p:nvCxnSpPr>
         <p:spPr>
           <a:xfrm rot="16200000" flipH="1">
-            <a:off x="27922751" y="21585512"/>
+            <a:off x="27922751" y="29063994"/>
             <a:ext cx="326831" cy="1198402"/>
           </a:xfrm>
           <a:prstGeom prst="bentConnector3">
@@ -17420,7 +17420,7 @@
         </p:nvCxnSpPr>
         <p:spPr>
           <a:xfrm>
-            <a:off x="27486965" y="22021298"/>
+            <a:off x="27486965" y="29499780"/>
             <a:ext cx="0" cy="314994"/>
           </a:xfrm>
           <a:prstGeom prst="straightConnector1">
@@ -17463,7 +17463,7 @@
         </p:nvCxnSpPr>
         <p:spPr>
           <a:xfrm>
-            <a:off x="27486965" y="22876292"/>
+            <a:off x="27486965" y="30354774"/>
             <a:ext cx="0" cy="273277"/>
           </a:xfrm>
           <a:prstGeom prst="straightConnector1">
@@ -17506,7 +17506,7 @@
         </p:nvCxnSpPr>
         <p:spPr>
           <a:xfrm rot="16200000" flipH="1">
-            <a:off x="27951860" y="22411397"/>
+            <a:off x="27951860" y="29889879"/>
             <a:ext cx="271922" cy="1201712"/>
           </a:xfrm>
           <a:prstGeom prst="bentConnector3">
@@ -17551,7 +17551,7 @@
         </p:nvCxnSpPr>
         <p:spPr>
           <a:xfrm>
-            <a:off x="28685367" y="22888129"/>
+            <a:off x="28685367" y="30366611"/>
             <a:ext cx="3310" cy="260085"/>
           </a:xfrm>
           <a:prstGeom prst="straightConnector1">
@@ -17590,7 +17590,7 @@
         </p:nvSpPr>
         <p:spPr>
           <a:xfrm>
-            <a:off x="24750422" y="23151943"/>
+            <a:off x="24750422" y="30630425"/>
             <a:ext cx="926325" cy="540000"/>
           </a:xfrm>
           <a:prstGeom prst="rect">
@@ -17644,7 +17644,7 @@
         </p:nvCxnSpPr>
         <p:spPr>
           <a:xfrm rot="5400000">
-            <a:off x="27385750" y="22654459"/>
+            <a:off x="27385750" y="30132941"/>
             <a:ext cx="269173" cy="2336682"/>
           </a:xfrm>
           <a:prstGeom prst="bentConnector3">
@@ -17690,7 +17690,7 @@
         </p:nvCxnSpPr>
         <p:spPr>
           <a:xfrm rot="16200000" flipH="1">
-            <a:off x="25044907" y="22650298"/>
+            <a:off x="25044907" y="30128780"/>
             <a:ext cx="269173" cy="2345003"/>
           </a:xfrm>
           <a:prstGeom prst="bentConnector3">
@@ -17736,7 +17736,7 @@
         </p:nvCxnSpPr>
         <p:spPr>
           <a:xfrm rot="16200000" flipH="1">
-            <a:off x="25650068" y="23255460"/>
+            <a:off x="25650068" y="30733942"/>
             <a:ext cx="265444" cy="1138410"/>
           </a:xfrm>
           <a:prstGeom prst="bentConnector3">
@@ -17782,7 +17782,7 @@
         </p:nvCxnSpPr>
         <p:spPr>
           <a:xfrm rot="5400000">
-            <a:off x="26785571" y="23255993"/>
+            <a:off x="26785571" y="30734475"/>
             <a:ext cx="267818" cy="1134970"/>
           </a:xfrm>
           <a:prstGeom prst="bentConnector3">
@@ -17828,7 +17828,7 @@
         </p:nvCxnSpPr>
         <p:spPr>
           <a:xfrm>
-            <a:off x="25211003" y="22022917"/>
+            <a:off x="25211003" y="29501399"/>
             <a:ext cx="0" cy="322268"/>
           </a:xfrm>
           <a:prstGeom prst="straightConnector1">
@@ -17871,7 +17871,7 @@
         </p:nvCxnSpPr>
         <p:spPr>
           <a:xfrm>
-            <a:off x="25211003" y="22885185"/>
+            <a:off x="25211003" y="30363667"/>
             <a:ext cx="2582" cy="266758"/>
           </a:xfrm>
           <a:prstGeom prst="straightConnector1">
@@ -17914,7 +17914,7 @@
         </p:nvCxnSpPr>
         <p:spPr>
           <a:xfrm rot="16200000" flipH="1">
-            <a:off x="25620924" y="21612995"/>
+            <a:off x="25620924" y="29091477"/>
             <a:ext cx="321148" cy="1140991"/>
           </a:xfrm>
           <a:prstGeom prst="bentConnector3">
@@ -17960,7 +17960,7 @@
         </p:nvCxnSpPr>
         <p:spPr>
           <a:xfrm rot="5400000">
-            <a:off x="26758097" y="21615196"/>
+            <a:off x="26758097" y="29093678"/>
             <a:ext cx="322767" cy="1134971"/>
           </a:xfrm>
           <a:prstGeom prst="bentConnector3">
@@ -18002,7 +18002,7 @@
         </p:nvSpPr>
         <p:spPr>
           <a:xfrm>
-            <a:off x="23549438" y="22345185"/>
+            <a:off x="23549438" y="29823667"/>
             <a:ext cx="926325" cy="540000"/>
           </a:xfrm>
           <a:prstGeom prst="rect">
@@ -18055,7 +18055,7 @@
         </p:nvCxnSpPr>
         <p:spPr>
           <a:xfrm rot="5400000">
-            <a:off x="24450668" y="21584850"/>
+            <a:off x="24450668" y="29063332"/>
             <a:ext cx="322268" cy="1198402"/>
           </a:xfrm>
           <a:prstGeom prst="bentConnector3">
@@ -18100,7 +18100,7 @@
         </p:nvCxnSpPr>
         <p:spPr>
           <a:xfrm rot="5400000">
-            <a:off x="24477484" y="22414694"/>
+            <a:off x="24477484" y="29893176"/>
             <a:ext cx="263029" cy="1204011"/>
           </a:xfrm>
           <a:prstGeom prst="bentConnector3">
@@ -18141,7 +18141,7 @@
         </p:nvSpPr>
         <p:spPr>
           <a:xfrm>
-            <a:off x="27623003" y="23957387"/>
+            <a:off x="27623003" y="31435869"/>
             <a:ext cx="926325" cy="540000"/>
           </a:xfrm>
           <a:prstGeom prst="rect">
@@ -18194,7 +18194,7 @@
         </p:nvCxnSpPr>
         <p:spPr>
           <a:xfrm rot="5400000">
-            <a:off x="28252836" y="23521545"/>
+            <a:off x="28252836" y="31000027"/>
             <a:ext cx="269173" cy="602511"/>
           </a:xfrm>
           <a:prstGeom prst="bentConnector3">
@@ -18239,7 +18239,7 @@
         </p:nvCxnSpPr>
         <p:spPr>
           <a:xfrm rot="16200000" flipH="1">
-            <a:off x="27652656" y="23523877"/>
+            <a:off x="27652656" y="31002359"/>
             <a:ext cx="267818" cy="599201"/>
           </a:xfrm>
           <a:prstGeom prst="bentConnector3">
@@ -18280,7 +18280,7 @@
         </p:nvSpPr>
         <p:spPr>
           <a:xfrm>
-            <a:off x="24151488" y="23961942"/>
+            <a:off x="24151488" y="31440424"/>
             <a:ext cx="926325" cy="540000"/>
           </a:xfrm>
           <a:prstGeom prst="rect">
@@ -18333,7 +18333,7 @@
         </p:nvCxnSpPr>
         <p:spPr>
           <a:xfrm rot="5400000">
-            <a:off x="24779119" y="23527475"/>
+            <a:off x="24779119" y="31005957"/>
             <a:ext cx="269999" cy="598934"/>
           </a:xfrm>
           <a:prstGeom prst="bentConnector3">
@@ -18374,7 +18374,7 @@
         </p:nvSpPr>
         <p:spPr>
           <a:xfrm>
-            <a:off x="24151488" y="24767387"/>
+            <a:off x="24151488" y="32245869"/>
             <a:ext cx="926325" cy="540000"/>
           </a:xfrm>
           <a:prstGeom prst="rect">
@@ -18427,7 +18427,7 @@
         </p:nvCxnSpPr>
         <p:spPr>
           <a:xfrm>
-            <a:off x="24614651" y="24501942"/>
+            <a:off x="24614651" y="31980424"/>
             <a:ext cx="0" cy="265445"/>
           </a:xfrm>
           <a:prstGeom prst="straightConnector1">
@@ -18466,7 +18466,7 @@
         </p:nvSpPr>
         <p:spPr>
           <a:xfrm>
-            <a:off x="27623003" y="24767387"/>
+            <a:off x="27623003" y="32245869"/>
             <a:ext cx="926325" cy="540000"/>
           </a:xfrm>
           <a:prstGeom prst="rect">
@@ -18519,7 +18519,7 @@
         </p:nvCxnSpPr>
         <p:spPr>
           <a:xfrm>
-            <a:off x="28086166" y="24497387"/>
+            <a:off x="28086166" y="31975869"/>
             <a:ext cx="0" cy="270000"/>
           </a:xfrm>
           <a:prstGeom prst="straightConnector1">
@@ -18656,7 +18656,7 @@
         </p:nvCxnSpPr>
         <p:spPr>
           <a:xfrm rot="5400000">
-            <a:off x="26781132" y="22448233"/>
+            <a:off x="26781132" y="29926715"/>
             <a:ext cx="277774" cy="1133892"/>
           </a:xfrm>
           <a:prstGeom prst="bentConnector3">
@@ -18702,7 +18702,7 @@
         </p:nvCxnSpPr>
         <p:spPr>
           <a:xfrm rot="16200000" flipH="1">
-            <a:off x="25647598" y="22448590"/>
+            <a:off x="25647598" y="29927072"/>
             <a:ext cx="268881" cy="1142070"/>
           </a:xfrm>
           <a:prstGeom prst="bentConnector3">
@@ -18744,7 +18744,7 @@
         </p:nvSpPr>
         <p:spPr>
           <a:xfrm>
-            <a:off x="25888831" y="22344065"/>
+            <a:off x="25888831" y="29822547"/>
             <a:ext cx="926325" cy="540000"/>
           </a:xfrm>
           <a:prstGeom prst="rect">
@@ -18797,7 +18797,7 @@
         </p:nvCxnSpPr>
         <p:spPr>
           <a:xfrm>
-            <a:off x="32920254" y="21153442"/>
+            <a:off x="32920254" y="28631924"/>
             <a:ext cx="0" cy="317388"/>
           </a:xfrm>
           <a:prstGeom prst="straightConnector1">
@@ -18836,7 +18836,7 @@
         </p:nvSpPr>
         <p:spPr>
           <a:xfrm>
-            <a:off x="19368174" y="18331630"/>
+            <a:off x="19368174" y="25810112"/>
             <a:ext cx="926325" cy="540000"/>
           </a:xfrm>
           <a:prstGeom prst="rect">
@@ -18887,7 +18887,7 @@
         </p:nvSpPr>
         <p:spPr>
           <a:xfrm>
-            <a:off x="19368173" y="19080913"/>
+            <a:off x="19368173" y="26559395"/>
             <a:ext cx="926325" cy="540000"/>
           </a:xfrm>
           <a:prstGeom prst="rect">
@@ -18938,7 +18938,7 @@
         </p:nvSpPr>
         <p:spPr>
           <a:xfrm>
-            <a:off x="19368173" y="20619541"/>
+            <a:off x="19368173" y="28098023"/>
             <a:ext cx="926325" cy="540000"/>
           </a:xfrm>
           <a:prstGeom prst="rect">
@@ -18994,7 +18994,7 @@
         </p:nvSpPr>
         <p:spPr>
           <a:xfrm>
-            <a:off x="18152494" y="20622310"/>
+            <a:off x="18152494" y="28100792"/>
             <a:ext cx="926325" cy="540000"/>
           </a:xfrm>
           <a:prstGeom prst="rect">
@@ -19045,7 +19045,7 @@
         </p:nvSpPr>
         <p:spPr>
           <a:xfrm>
-            <a:off x="16949668" y="19079209"/>
+            <a:off x="16949668" y="26557691"/>
             <a:ext cx="926325" cy="540000"/>
           </a:xfrm>
           <a:prstGeom prst="rect">
@@ -19096,7 +19096,7 @@
         </p:nvSpPr>
         <p:spPr>
           <a:xfrm>
-            <a:off x="16948240" y="20622084"/>
+            <a:off x="16948240" y="28100566"/>
             <a:ext cx="926325" cy="540000"/>
           </a:xfrm>
           <a:prstGeom prst="rect">
@@ -19147,7 +19147,7 @@
         </p:nvSpPr>
         <p:spPr>
           <a:xfrm>
-            <a:off x="18156731" y="19821421"/>
+            <a:off x="18156731" y="27299903"/>
             <a:ext cx="926325" cy="540000"/>
           </a:xfrm>
           <a:prstGeom prst="rect">
@@ -19198,7 +19198,7 @@
         </p:nvSpPr>
         <p:spPr>
           <a:xfrm>
-            <a:off x="18156268" y="19075481"/>
+            <a:off x="18156268" y="26553963"/>
             <a:ext cx="926325" cy="540000"/>
           </a:xfrm>
           <a:prstGeom prst="rect">
@@ -19249,7 +19249,7 @@
         </p:nvSpPr>
         <p:spPr>
           <a:xfrm>
-            <a:off x="17550481" y="21481298"/>
+            <a:off x="17550481" y="28959780"/>
             <a:ext cx="926325" cy="540000"/>
           </a:xfrm>
           <a:prstGeom prst="rect">
@@ -19305,7 +19305,7 @@
         </p:nvSpPr>
         <p:spPr>
           <a:xfrm>
-            <a:off x="16949667" y="22341942"/>
+            <a:off x="16949667" y="29820424"/>
             <a:ext cx="926325" cy="540000"/>
           </a:xfrm>
           <a:prstGeom prst="rect">
@@ -19356,7 +19356,7 @@
         </p:nvSpPr>
         <p:spPr>
           <a:xfrm>
-            <a:off x="21151538" y="21481297"/>
+            <a:off x="21151538" y="28959779"/>
             <a:ext cx="926325" cy="540000"/>
           </a:xfrm>
           <a:prstGeom prst="rect">
@@ -19414,7 +19414,7 @@
         </p:nvCxnSpPr>
         <p:spPr>
           <a:xfrm rot="5400000">
-            <a:off x="22079749" y="20695602"/>
+            <a:off x="22079749" y="28174084"/>
             <a:ext cx="320647" cy="1250742"/>
           </a:xfrm>
           <a:prstGeom prst="bentConnector3">
@@ -19455,7 +19455,7 @@
         </p:nvSpPr>
         <p:spPr>
           <a:xfrm>
-            <a:off x="17550481" y="23148214"/>
+            <a:off x="17550481" y="30626696"/>
             <a:ext cx="926325" cy="540000"/>
           </a:xfrm>
           <a:prstGeom prst="rect">
@@ -19510,7 +19510,7 @@
         </p:nvCxnSpPr>
         <p:spPr>
           <a:xfrm rot="5400000">
-            <a:off x="18518295" y="17766166"/>
+            <a:off x="18518295" y="25244648"/>
             <a:ext cx="207579" cy="2418506"/>
           </a:xfrm>
           <a:prstGeom prst="bentConnector3">
@@ -19555,7 +19555,7 @@
         </p:nvCxnSpPr>
         <p:spPr>
           <a:xfrm rot="5400000">
-            <a:off x="19123459" y="18367602"/>
+            <a:off x="19123459" y="25846084"/>
             <a:ext cx="203851" cy="1211906"/>
           </a:xfrm>
           <a:prstGeom prst="bentConnector3">
@@ -19600,7 +19600,7 @@
         </p:nvCxnSpPr>
         <p:spPr>
           <a:xfrm flipH="1">
-            <a:off x="19831336" y="18871630"/>
+            <a:off x="19831336" y="26350112"/>
             <a:ext cx="1" cy="209283"/>
           </a:xfrm>
           <a:prstGeom prst="straightConnector1">
@@ -19643,7 +19643,7 @@
         </p:nvCxnSpPr>
         <p:spPr>
           <a:xfrm rot="16200000" flipH="1">
-            <a:off x="17915256" y="19116783"/>
+            <a:off x="17915256" y="26595265"/>
             <a:ext cx="202212" cy="1207063"/>
           </a:xfrm>
           <a:prstGeom prst="bentConnector3">
@@ -19689,7 +19689,7 @@
         </p:nvCxnSpPr>
         <p:spPr>
           <a:xfrm rot="5400000">
-            <a:off x="19125361" y="19115446"/>
+            <a:off x="19125361" y="26593928"/>
             <a:ext cx="200508" cy="1211442"/>
           </a:xfrm>
           <a:prstGeom prst="bentConnector3">
@@ -19735,7 +19735,7 @@
         </p:nvCxnSpPr>
         <p:spPr>
           <a:xfrm rot="16200000" flipH="1">
-            <a:off x="18516692" y="19718219"/>
+            <a:off x="18516692" y="27196701"/>
             <a:ext cx="205940" cy="463"/>
           </a:xfrm>
           <a:prstGeom prst="bentConnector3">
@@ -19781,7 +19781,7 @@
         </p:nvCxnSpPr>
         <p:spPr>
           <a:xfrm rot="5400000">
-            <a:off x="17885318" y="19887507"/>
+            <a:off x="17885318" y="27365989"/>
             <a:ext cx="260663" cy="1208491"/>
           </a:xfrm>
           <a:prstGeom prst="bentConnector3">
@@ -19826,7 +19826,7 @@
         </p:nvCxnSpPr>
         <p:spPr>
           <a:xfrm rot="16200000" flipH="1">
-            <a:off x="19096555" y="19884760"/>
+            <a:off x="19096555" y="27363242"/>
             <a:ext cx="258120" cy="1211442"/>
           </a:xfrm>
           <a:prstGeom prst="bentConnector3">
@@ -19871,7 +19871,7 @@
         </p:nvCxnSpPr>
         <p:spPr>
           <a:xfrm rot="5400000">
-            <a:off x="17756831" y="20618234"/>
+            <a:off x="17756831" y="28096716"/>
             <a:ext cx="1119877" cy="606250"/>
           </a:xfrm>
           <a:prstGeom prst="bentConnector3">
@@ -19916,7 +19916,7 @@
         </p:nvCxnSpPr>
         <p:spPr>
           <a:xfrm rot="5400000">
-            <a:off x="17552915" y="21881213"/>
+            <a:off x="17552915" y="29359695"/>
             <a:ext cx="320644" cy="600814"/>
           </a:xfrm>
           <a:prstGeom prst="bentConnector3">
@@ -19961,7 +19961,7 @@
         </p:nvCxnSpPr>
         <p:spPr>
           <a:xfrm>
-            <a:off x="18013644" y="22021298"/>
+            <a:off x="18013644" y="29499780"/>
             <a:ext cx="0" cy="1126916"/>
           </a:xfrm>
           <a:prstGeom prst="straightConnector1">
@@ -20004,7 +20004,7 @@
         </p:nvCxnSpPr>
         <p:spPr>
           <a:xfrm>
-            <a:off x="18476806" y="21751298"/>
+            <a:off x="18476806" y="29229780"/>
             <a:ext cx="272076" cy="0"/>
           </a:xfrm>
           <a:prstGeom prst="line">
@@ -20049,7 +20049,7 @@
         </p:nvCxnSpPr>
         <p:spPr>
           <a:xfrm flipH="1">
-            <a:off x="18615657" y="20361421"/>
+            <a:off x="18615657" y="27839903"/>
             <a:ext cx="4237" cy="260889"/>
           </a:xfrm>
           <a:prstGeom prst="straightConnector1">
@@ -20088,7 +20088,7 @@
         </p:nvSpPr>
         <p:spPr>
           <a:xfrm>
-            <a:off x="18748882" y="21481298"/>
+            <a:off x="18748882" y="28959780"/>
             <a:ext cx="926325" cy="540000"/>
           </a:xfrm>
           <a:prstGeom prst="rect">
@@ -20148,7 +20148,7 @@
         </p:nvCxnSpPr>
         <p:spPr>
           <a:xfrm rot="16200000" flipH="1">
-            <a:off x="18356031" y="20625283"/>
+            <a:off x="18356031" y="28103765"/>
             <a:ext cx="1119877" cy="592151"/>
           </a:xfrm>
           <a:prstGeom prst="bentConnector3">
@@ -20189,7 +20189,7 @@
         </p:nvSpPr>
         <p:spPr>
           <a:xfrm>
-            <a:off x="19947284" y="21481297"/>
+            <a:off x="19947284" y="28959779"/>
             <a:ext cx="926325" cy="540000"/>
           </a:xfrm>
           <a:prstGeom prst="rect">
@@ -20240,7 +20240,7 @@
         </p:nvSpPr>
         <p:spPr>
           <a:xfrm>
-            <a:off x="18153823" y="22346496"/>
+            <a:off x="18153823" y="29824978"/>
             <a:ext cx="926325" cy="540000"/>
           </a:xfrm>
           <a:prstGeom prst="rect">
@@ -20295,7 +20295,7 @@
         </p:nvCxnSpPr>
         <p:spPr>
           <a:xfrm flipV="1">
-            <a:off x="19675207" y="21751297"/>
+            <a:off x="19675207" y="29229779"/>
             <a:ext cx="272077" cy="1"/>
           </a:xfrm>
           <a:prstGeom prst="line">
@@ -20340,7 +20340,7 @@
         </p:nvCxnSpPr>
         <p:spPr>
           <a:xfrm rot="16200000" flipH="1">
-            <a:off x="18955232" y="20026082"/>
+            <a:off x="18955232" y="27504564"/>
             <a:ext cx="1119876" cy="1790553"/>
           </a:xfrm>
           <a:prstGeom prst="bentConnector3">
@@ -20381,7 +20381,7 @@
         </p:nvSpPr>
         <p:spPr>
           <a:xfrm>
-            <a:off x="19368173" y="22341942"/>
+            <a:off x="19368173" y="29820424"/>
             <a:ext cx="926325" cy="540000"/>
           </a:xfrm>
           <a:prstGeom prst="rect">
@@ -20432,7 +20432,7 @@
         </p:nvSpPr>
         <p:spPr>
           <a:xfrm>
-            <a:off x="18748160" y="23147386"/>
+            <a:off x="18748160" y="30625868"/>
             <a:ext cx="926325" cy="540000"/>
           </a:xfrm>
           <a:prstGeom prst="rect">
@@ -20483,7 +20483,7 @@
         </p:nvSpPr>
         <p:spPr>
           <a:xfrm>
-            <a:off x="19946562" y="23148213"/>
+            <a:off x="19946562" y="30626695"/>
             <a:ext cx="926325" cy="540000"/>
           </a:xfrm>
           <a:prstGeom prst="rect">
@@ -20534,7 +20534,7 @@
         </p:nvSpPr>
         <p:spPr>
           <a:xfrm>
-            <a:off x="19946561" y="23958645"/>
+            <a:off x="19946561" y="31437127"/>
             <a:ext cx="926325" cy="540000"/>
           </a:xfrm>
           <a:prstGeom prst="rect">
@@ -20589,7 +20589,7 @@
         </p:nvCxnSpPr>
         <p:spPr>
           <a:xfrm rot="5400000">
-            <a:off x="19960570" y="21892064"/>
+            <a:off x="19960570" y="29370546"/>
             <a:ext cx="320645" cy="579111"/>
           </a:xfrm>
           <a:prstGeom prst="bentConnector3">
@@ -20634,7 +20634,7 @@
         </p:nvCxnSpPr>
         <p:spPr>
           <a:xfrm flipH="1">
-            <a:off x="20409725" y="22021297"/>
+            <a:off x="20409725" y="29499779"/>
             <a:ext cx="722" cy="1126916"/>
           </a:xfrm>
           <a:prstGeom prst="straightConnector1">
@@ -20673,7 +20673,7 @@
         </p:nvSpPr>
         <p:spPr>
           <a:xfrm>
-            <a:off x="18748159" y="23957387"/>
+            <a:off x="18748159" y="31435869"/>
             <a:ext cx="926325" cy="540000"/>
           </a:xfrm>
           <a:prstGeom prst="rect">
@@ -20724,7 +20724,7 @@
         </p:nvSpPr>
         <p:spPr>
           <a:xfrm>
-            <a:off x="17550481" y="23961942"/>
+            <a:off x="17550481" y="31440424"/>
             <a:ext cx="926325" cy="540000"/>
           </a:xfrm>
           <a:prstGeom prst="rect">
@@ -20779,7 +20779,7 @@
         </p:nvCxnSpPr>
         <p:spPr>
           <a:xfrm>
-            <a:off x="18013644" y="23688214"/>
+            <a:off x="18013644" y="31166696"/>
             <a:ext cx="0" cy="273728"/>
           </a:xfrm>
           <a:prstGeom prst="straightConnector1">
@@ -20822,7 +20822,7 @@
         </p:nvCxnSpPr>
         <p:spPr>
           <a:xfrm flipH="1">
-            <a:off x="19211322" y="23687386"/>
+            <a:off x="19211322" y="31165868"/>
             <a:ext cx="1" cy="270001"/>
           </a:xfrm>
           <a:prstGeom prst="straightConnector1">
@@ -20865,7 +20865,7 @@
         </p:nvCxnSpPr>
         <p:spPr>
           <a:xfrm flipH="1">
-            <a:off x="20409724" y="23688213"/>
+            <a:off x="20409724" y="31166695"/>
             <a:ext cx="1" cy="270432"/>
           </a:xfrm>
           <a:prstGeom prst="straightConnector1">
@@ -20908,7 +20908,7 @@
         </p:nvCxnSpPr>
         <p:spPr>
           <a:xfrm rot="5400000">
-            <a:off x="18751917" y="21886368"/>
+            <a:off x="18751917" y="29364850"/>
             <a:ext cx="325198" cy="595059"/>
           </a:xfrm>
           <a:prstGeom prst="bentConnector3">
@@ -20953,7 +20953,7 @@
         </p:nvCxnSpPr>
         <p:spPr>
           <a:xfrm flipH="1">
-            <a:off x="19211323" y="22021298"/>
+            <a:off x="19211323" y="29499780"/>
             <a:ext cx="722" cy="1126088"/>
           </a:xfrm>
           <a:prstGeom prst="straightConnector1">
@@ -20992,7 +20992,7 @@
         </p:nvSpPr>
         <p:spPr>
           <a:xfrm>
-            <a:off x="23543587" y="21478000"/>
+            <a:off x="23543587" y="28956482"/>
             <a:ext cx="926325" cy="540000"/>
           </a:xfrm>
           <a:prstGeom prst="rect">
@@ -21050,7 +21050,7 @@
         </p:nvCxnSpPr>
         <p:spPr>
           <a:xfrm rot="16200000" flipH="1">
-            <a:off x="23277421" y="20748671"/>
+            <a:off x="23277421" y="28227153"/>
             <a:ext cx="317350" cy="1141307"/>
           </a:xfrm>
           <a:prstGeom prst="bentConnector3">
@@ -21091,7 +21091,7 @@
         </p:nvSpPr>
         <p:spPr>
           <a:xfrm>
-            <a:off x="21798535" y="22329516"/>
+            <a:off x="21798535" y="29807998"/>
             <a:ext cx="926325" cy="540000"/>
           </a:xfrm>
           <a:prstGeom prst="rect">
@@ -21145,7 +21145,7 @@
         </p:nvSpPr>
         <p:spPr>
           <a:xfrm>
-            <a:off x="20592128" y="22344065"/>
+            <a:off x="20592128" y="29822547"/>
             <a:ext cx="926325" cy="540000"/>
           </a:xfrm>
           <a:prstGeom prst="rect">
@@ -21203,7 +21203,7 @@
         </p:nvCxnSpPr>
         <p:spPr>
           <a:xfrm rot="5400000">
-            <a:off x="21368660" y="20847281"/>
+            <a:off x="21368660" y="28325763"/>
             <a:ext cx="1183415" cy="1810152"/>
           </a:xfrm>
           <a:prstGeom prst="bentConnector3">
@@ -21248,7 +21248,7 @@
         </p:nvCxnSpPr>
         <p:spPr>
           <a:xfrm rot="5400000">
-            <a:off x="22409509" y="21873582"/>
+            <a:off x="22409509" y="29352064"/>
             <a:ext cx="308123" cy="603744"/>
           </a:xfrm>
           <a:prstGeom prst="bentConnector3">
@@ -21293,7 +21293,7 @@
         </p:nvCxnSpPr>
         <p:spPr>
           <a:xfrm rot="16200000" flipH="1">
-            <a:off x="21784090" y="21851907"/>
+            <a:off x="21784090" y="29330389"/>
             <a:ext cx="308219" cy="646997"/>
           </a:xfrm>
           <a:prstGeom prst="bentConnector3">
@@ -21334,7 +21334,7 @@
         </p:nvSpPr>
         <p:spPr>
           <a:xfrm>
-            <a:off x="22401454" y="23151943"/>
+            <a:off x="22401454" y="30630425"/>
             <a:ext cx="926325" cy="540000"/>
           </a:xfrm>
           <a:prstGeom prst="rect">
@@ -21392,7 +21392,7 @@
         </p:nvCxnSpPr>
         <p:spPr>
           <a:xfrm flipH="1">
-            <a:off x="22864617" y="22021393"/>
+            <a:off x="22864617" y="29499875"/>
             <a:ext cx="825" cy="1130550"/>
           </a:xfrm>
           <a:prstGeom prst="straightConnector1">
@@ -21435,7 +21435,7 @@
         </p:nvCxnSpPr>
         <p:spPr>
           <a:xfrm flipH="1">
-            <a:off x="17411403" y="19619209"/>
+            <a:off x="17411403" y="27097691"/>
             <a:ext cx="1428" cy="1002875"/>
           </a:xfrm>
           <a:prstGeom prst="straightConnector1">
@@ -21478,7 +21478,7 @@
         </p:nvCxnSpPr>
         <p:spPr>
           <a:xfrm>
-            <a:off x="19831336" y="19620913"/>
+            <a:off x="19831336" y="27099395"/>
             <a:ext cx="0" cy="998628"/>
           </a:xfrm>
           <a:prstGeom prst="straightConnector1">
@@ -21521,7 +21521,7 @@
         </p:nvCxnSpPr>
         <p:spPr>
           <a:xfrm rot="16200000" flipH="1">
-            <a:off x="21674336" y="21961662"/>
+            <a:off x="21674336" y="29440144"/>
             <a:ext cx="1130646" cy="1249916"/>
           </a:xfrm>
           <a:prstGeom prst="bentConnector3">
@@ -21848,7 +21848,7 @@
         </p:nvSpPr>
         <p:spPr>
           <a:xfrm>
-            <a:off x="34876999" y="23957386"/>
+            <a:off x="34876999" y="31435868"/>
             <a:ext cx="926325" cy="540000"/>
           </a:xfrm>
           <a:prstGeom prst="rect">
@@ -21901,7 +21901,7 @@
         </p:nvCxnSpPr>
         <p:spPr>
           <a:xfrm>
-            <a:off x="35340162" y="22009878"/>
+            <a:off x="35340162" y="29488360"/>
             <a:ext cx="0" cy="1947508"/>
           </a:xfrm>
           <a:prstGeom prst="straightConnector1">
@@ -21940,7 +21940,7 @@
         </p:nvSpPr>
         <p:spPr>
           <a:xfrm>
-            <a:off x="28224951" y="21476911"/>
+            <a:off x="28224951" y="28955393"/>
             <a:ext cx="926325" cy="540000"/>
           </a:xfrm>
           <a:prstGeom prst="rect">
@@ -21993,7 +21993,7 @@
         </p:nvCxnSpPr>
         <p:spPr>
           <a:xfrm rot="16200000" flipH="1">
-            <a:off x="27358998" y="20147794"/>
+            <a:off x="27358998" y="27626276"/>
             <a:ext cx="322113" cy="2336120"/>
           </a:xfrm>
           <a:prstGeom prst="bentConnector3">
@@ -22124,7 +22124,7 @@
         </p:nvSpPr>
         <p:spPr>
           <a:xfrm>
-            <a:off x="21798535" y="19821831"/>
+            <a:off x="21798535" y="27300313"/>
             <a:ext cx="926325" cy="540000"/>
           </a:xfrm>
           <a:prstGeom prst="rect">
@@ -22181,7 +22181,7 @@
         </p:nvSpPr>
         <p:spPr>
           <a:xfrm>
-            <a:off x="23535903" y="20621477"/>
+            <a:off x="23535903" y="28099959"/>
             <a:ext cx="926325" cy="540000"/>
           </a:xfrm>
           <a:prstGeom prst="rect">
@@ -22230,7 +22230,7 @@
         </p:nvSpPr>
         <p:spPr>
           <a:xfrm>
-            <a:off x="27023802" y="20615474"/>
+            <a:off x="27023802" y="28093956"/>
             <a:ext cx="926325" cy="540000"/>
           </a:xfrm>
           <a:prstGeom prst="rect">
@@ -22289,7 +22289,7 @@
         </p:nvSpPr>
         <p:spPr>
           <a:xfrm>
-            <a:off x="28229169" y="20613442"/>
+            <a:off x="28229169" y="28091924"/>
             <a:ext cx="926325" cy="540000"/>
           </a:xfrm>
           <a:prstGeom prst="rect">
@@ -22347,7 +22347,7 @@
         </p:nvCxnSpPr>
         <p:spPr>
           <a:xfrm rot="16200000" flipH="1">
-            <a:off x="22027588" y="18649999"/>
+            <a:off x="22027588" y="26128481"/>
             <a:ext cx="1002268" cy="2940687"/>
           </a:xfrm>
           <a:prstGeom prst="bentConnector3">
@@ -22392,7 +22392,7 @@
         </p:nvCxnSpPr>
         <p:spPr>
           <a:xfrm rot="5400000">
-            <a:off x="26793931" y="19921764"/>
+            <a:off x="26793931" y="27400246"/>
             <a:ext cx="251098" cy="1134971"/>
           </a:xfrm>
           <a:prstGeom prst="bentConnector3">
@@ -22437,7 +22437,7 @@
         </p:nvCxnSpPr>
         <p:spPr>
           <a:xfrm rot="16200000" flipH="1">
-            <a:off x="27964777" y="19885887"/>
+            <a:off x="27964777" y="27364369"/>
             <a:ext cx="249742" cy="1205367"/>
           </a:xfrm>
           <a:prstGeom prst="bentConnector3">
@@ -22482,7 +22482,7 @@
         </p:nvCxnSpPr>
         <p:spPr>
           <a:xfrm rot="16200000" flipH="1">
-            <a:off x="21558727" y="19118860"/>
+            <a:off x="21558727" y="26597342"/>
             <a:ext cx="202622" cy="1203319"/>
           </a:xfrm>
           <a:prstGeom prst="bentConnector3">
@@ -22523,7 +22523,7 @@
         </p:nvSpPr>
         <p:spPr>
           <a:xfrm>
-            <a:off x="24747840" y="20625117"/>
+            <a:off x="24747840" y="28103599"/>
             <a:ext cx="926325" cy="540000"/>
           </a:xfrm>
           <a:prstGeom prst="rect">
@@ -22574,7 +22574,7 @@
         </p:nvCxnSpPr>
         <p:spPr>
           <a:xfrm rot="16200000" flipH="1">
-            <a:off x="23306683" y="17370907"/>
+            <a:off x="23306683" y="24849389"/>
             <a:ext cx="206589" cy="4703194"/>
           </a:xfrm>
           <a:prstGeom prst="bentConnector3">
@@ -22619,7 +22619,7 @@
         </p:nvCxnSpPr>
         <p:spPr>
           <a:xfrm rot="5400000">
-            <a:off x="25356629" y="20220172"/>
+            <a:off x="25356629" y="27698654"/>
             <a:ext cx="259319" cy="550570"/>
           </a:xfrm>
           <a:prstGeom prst="bentConnector3">
@@ -22660,7 +22660,7 @@
         </p:nvSpPr>
         <p:spPr>
           <a:xfrm>
-            <a:off x="21153742" y="20614798"/>
+            <a:off x="21153742" y="28093280"/>
             <a:ext cx="926325" cy="540000"/>
           </a:xfrm>
           <a:prstGeom prst="rect">
@@ -22718,7 +22718,7 @@
         </p:nvCxnSpPr>
         <p:spPr>
           <a:xfrm rot="16200000" flipH="1">
-            <a:off x="20839848" y="19837740"/>
+            <a:off x="20839848" y="27316222"/>
             <a:ext cx="995589" cy="558526"/>
           </a:xfrm>
           <a:prstGeom prst="bentConnector3">
@@ -22983,7 +22983,7 @@
         </p:nvSpPr>
         <p:spPr>
           <a:xfrm>
-            <a:off x="24538032" y="11818771"/>
+            <a:off x="23947163" y="11614110"/>
             <a:ext cx="926325" cy="540000"/>
           </a:xfrm>
           <a:prstGeom prst="rect">
@@ -23040,9 +23040,9 @@
           <p:nvPr/>
         </p:nvCxnSpPr>
         <p:spPr>
-          <a:xfrm rot="16200000" flipH="1">
-            <a:off x="24487617" y="11305192"/>
-            <a:ext cx="436289" cy="590868"/>
+          <a:xfrm rot="5400000">
+            <a:off x="24294513" y="11498296"/>
+            <a:ext cx="231628" cy="1"/>
           </a:xfrm>
           <a:prstGeom prst="bentConnector3">
             <a:avLst>
@@ -23082,7 +23082,7 @@
         </p:nvSpPr>
         <p:spPr>
           <a:xfrm>
-            <a:off x="25090698" y="10845905"/>
+            <a:off x="24540971" y="12370891"/>
             <a:ext cx="926325" cy="540000"/>
           </a:xfrm>
           <a:prstGeom prst="rect">
@@ -23140,12 +23140,12 @@
         </p:nvCxnSpPr>
         <p:spPr>
           <a:xfrm rot="16200000" flipH="1">
-            <a:off x="24861776" y="10153819"/>
-            <a:ext cx="240905" cy="1143266"/>
+            <a:off x="23824419" y="11191175"/>
+            <a:ext cx="1765891" cy="593539"/>
           </a:xfrm>
           <a:prstGeom prst="bentConnector3">
             <a:avLst>
-              <a:gd name="adj1" fmla="val 50000"/>
+              <a:gd name="adj1" fmla="val 4778"/>
             </a:avLst>
           </a:prstGeom>
           <a:ln w="19050">
@@ -24820,7 +24820,7 @@
         </p:nvSpPr>
         <p:spPr>
           <a:xfrm>
-            <a:off x="19309730" y="17570130"/>
+            <a:off x="19309730" y="25048612"/>
             <a:ext cx="2171900" cy="626284"/>
           </a:xfrm>
           <a:prstGeom prst="rect">
@@ -24882,7 +24882,7 @@
         </p:nvSpPr>
         <p:spPr>
           <a:xfrm>
-            <a:off x="20986950" y="17737391"/>
+            <a:off x="20986950" y="25215873"/>
             <a:ext cx="136680" cy="93111"/>
           </a:xfrm>
           <a:prstGeom prst="rect">
@@ -25542,7 +25542,7 @@
         </p:nvCxnSpPr>
         <p:spPr>
           <a:xfrm>
-            <a:off x="30365064" y="22611944"/>
+            <a:off x="30365064" y="30090426"/>
             <a:ext cx="284014" cy="0"/>
           </a:xfrm>
           <a:prstGeom prst="line">

--- a/Наработки/диздоки/Франция/Франция.pptx
+++ b/Наработки/диздоки/Франция/Франция.pptx
@@ -209,7 +209,7 @@
             <a:fld id="{33E3D7F9-E251-484C-A6FF-FA958879DF69}" type="datetimeFigureOut">
               <a:rPr lang="ru-RU" smtClean="0"/>
               <a:pPr/>
-              <a:t>01.07.2026</a:t>
+              <a:t>07.07.2026</a:t>
             </a:fld>
             <a:endParaRPr lang="ru-RU"/>
           </a:p>
@@ -699,7 +699,7 @@
             <a:fld id="{85A5DE44-605B-4D3B-B2B7-94543DF81A36}" type="datetimeFigureOut">
               <a:rPr lang="ru-RU" smtClean="0"/>
               <a:pPr/>
-              <a:t>01.07.2026</a:t>
+              <a:t>07.07.2026</a:t>
             </a:fld>
             <a:endParaRPr lang="ru-RU"/>
           </a:p>
@@ -871,7 +871,7 @@
             <a:fld id="{85A5DE44-605B-4D3B-B2B7-94543DF81A36}" type="datetimeFigureOut">
               <a:rPr lang="ru-RU" smtClean="0"/>
               <a:pPr/>
-              <a:t>01.07.2026</a:t>
+              <a:t>07.07.2026</a:t>
             </a:fld>
             <a:endParaRPr lang="ru-RU"/>
           </a:p>
@@ -1053,7 +1053,7 @@
             <a:fld id="{85A5DE44-605B-4D3B-B2B7-94543DF81A36}" type="datetimeFigureOut">
               <a:rPr lang="ru-RU" smtClean="0"/>
               <a:pPr/>
-              <a:t>01.07.2026</a:t>
+              <a:t>07.07.2026</a:t>
             </a:fld>
             <a:endParaRPr lang="ru-RU"/>
           </a:p>
@@ -1225,7 +1225,7 @@
             <a:fld id="{85A5DE44-605B-4D3B-B2B7-94543DF81A36}" type="datetimeFigureOut">
               <a:rPr lang="ru-RU" smtClean="0"/>
               <a:pPr/>
-              <a:t>01.07.2026</a:t>
+              <a:t>07.07.2026</a:t>
             </a:fld>
             <a:endParaRPr lang="ru-RU"/>
           </a:p>
@@ -1473,7 +1473,7 @@
             <a:fld id="{85A5DE44-605B-4D3B-B2B7-94543DF81A36}" type="datetimeFigureOut">
               <a:rPr lang="ru-RU" smtClean="0"/>
               <a:pPr/>
-              <a:t>01.07.2026</a:t>
+              <a:t>07.07.2026</a:t>
             </a:fld>
             <a:endParaRPr lang="ru-RU"/>
           </a:p>
@@ -1707,7 +1707,7 @@
             <a:fld id="{85A5DE44-605B-4D3B-B2B7-94543DF81A36}" type="datetimeFigureOut">
               <a:rPr lang="ru-RU" smtClean="0"/>
               <a:pPr/>
-              <a:t>01.07.2026</a:t>
+              <a:t>07.07.2026</a:t>
             </a:fld>
             <a:endParaRPr lang="ru-RU"/>
           </a:p>
@@ -2076,7 +2076,7 @@
             <a:fld id="{85A5DE44-605B-4D3B-B2B7-94543DF81A36}" type="datetimeFigureOut">
               <a:rPr lang="ru-RU" smtClean="0"/>
               <a:pPr/>
-              <a:t>01.07.2026</a:t>
+              <a:t>07.07.2026</a:t>
             </a:fld>
             <a:endParaRPr lang="ru-RU"/>
           </a:p>
@@ -2196,7 +2196,7 @@
             <a:fld id="{85A5DE44-605B-4D3B-B2B7-94543DF81A36}" type="datetimeFigureOut">
               <a:rPr lang="ru-RU" smtClean="0"/>
               <a:pPr/>
-              <a:t>01.07.2026</a:t>
+              <a:t>07.07.2026</a:t>
             </a:fld>
             <a:endParaRPr lang="ru-RU"/>
           </a:p>
@@ -2293,7 +2293,7 @@
             <a:fld id="{85A5DE44-605B-4D3B-B2B7-94543DF81A36}" type="datetimeFigureOut">
               <a:rPr lang="ru-RU" smtClean="0"/>
               <a:pPr/>
-              <a:t>01.07.2026</a:t>
+              <a:t>07.07.2026</a:t>
             </a:fld>
             <a:endParaRPr lang="ru-RU"/>
           </a:p>
@@ -2572,7 +2572,7 @@
             <a:fld id="{85A5DE44-605B-4D3B-B2B7-94543DF81A36}" type="datetimeFigureOut">
               <a:rPr lang="ru-RU" smtClean="0"/>
               <a:pPr/>
-              <a:t>01.07.2026</a:t>
+              <a:t>07.07.2026</a:t>
             </a:fld>
             <a:endParaRPr lang="ru-RU"/>
           </a:p>
@@ -2831,7 +2831,7 @@
             <a:fld id="{85A5DE44-605B-4D3B-B2B7-94543DF81A36}" type="datetimeFigureOut">
               <a:rPr lang="ru-RU" smtClean="0"/>
               <a:pPr/>
-              <a:t>01.07.2026</a:t>
+              <a:t>07.07.2026</a:t>
             </a:fld>
             <a:endParaRPr lang="ru-RU"/>
           </a:p>
@@ -3046,7 +3046,7 @@
             <a:fld id="{85A5DE44-605B-4D3B-B2B7-94543DF81A36}" type="datetimeFigureOut">
               <a:rPr lang="ru-RU" smtClean="0"/>
               <a:pPr/>
-              <a:t>01.07.2026</a:t>
+              <a:t>07.07.2026</a:t>
             </a:fld>
             <a:endParaRPr lang="ru-RU"/>
           </a:p>
@@ -7860,7 +7860,7 @@
         </p:nvSpPr>
         <p:spPr>
           <a:xfrm>
-            <a:off x="10012655" y="5266800"/>
+            <a:off x="11670834" y="5895717"/>
             <a:ext cx="926325" cy="540000"/>
           </a:xfrm>
           <a:prstGeom prst="rect">
@@ -22759,7 +22759,7 @@
         </p:nvSpPr>
         <p:spPr>
           <a:xfrm>
-            <a:off x="5886304" y="5334300"/>
+            <a:off x="9465369" y="5320463"/>
             <a:ext cx="926325" cy="540000"/>
           </a:xfrm>
           <a:prstGeom prst="rect">
@@ -25030,7 +25030,7 @@
         </p:nvSpPr>
         <p:spPr>
           <a:xfrm>
-            <a:off x="4172990" y="5341287"/>
+            <a:off x="4066401" y="6120202"/>
             <a:ext cx="926325" cy="540000"/>
           </a:xfrm>
           <a:prstGeom prst="rect">
@@ -25062,8 +25062,11 @@
             <a:pPr algn="ctr"/>
             <a:r>
               <a:rPr lang="ru-RU" sz="700" dirty="0"/>
-              <a:t>Восстановить связи с католической церковью </a:t>
-            </a:r>
+              <a:t>Восстановить связи с католической церковью</a:t>
+            </a:r>
+          </a:p>
+          <a:p>
+            <a:pPr algn="ctr"/>
             <a:r>
               <a:rPr lang="ru-RU" sz="500" dirty="0"/>
               <a:t>(Получить прощение от Папы)</a:t>
@@ -25086,7 +25089,7 @@
         </p:nvSpPr>
         <p:spPr>
           <a:xfrm>
-            <a:off x="5890426" y="6146934"/>
+            <a:off x="6578989" y="5332100"/>
             <a:ext cx="926325" cy="540000"/>
           </a:xfrm>
           <a:prstGeom prst="rect">
@@ -25118,8 +25121,21 @@
             <a:pPr algn="ctr"/>
             <a:r>
               <a:rPr lang="ru-RU" sz="700" dirty="0"/>
-              <a:t>Коронация монарха</a:t>
-            </a:r>
+              <a:t>Отменить наследие  Французской революции </a:t>
+            </a:r>
+            <a:r>
+              <a:rPr lang="ru-RU" sz="200" dirty="0"/>
+              <a:t>(</a:t>
+            </a:r>
+            <a:r>
+              <a:rPr lang="ru-RU" sz="200" dirty="0" err="1"/>
+              <a:t>Антипарламентаризм</a:t>
+            </a:r>
+            <a:r>
+              <a:rPr lang="ru-RU" sz="200" dirty="0"/>
+              <a:t>: отрицание демократии, выборов и многопартийности, которые монархисты считали причиной раскола и слабости страны.)</a:t>
+            </a:r>
+            <a:endParaRPr lang="ru-RU" sz="700" dirty="0"/>
           </a:p>
         </p:txBody>
       </p:sp>
@@ -25137,7 +25153,7 @@
         </p:nvSpPr>
         <p:spPr>
           <a:xfrm>
-            <a:off x="4744721" y="6901319"/>
+            <a:off x="5885235" y="6138870"/>
             <a:ext cx="926325" cy="540000"/>
           </a:xfrm>
           <a:prstGeom prst="rect">
@@ -25169,7 +25185,7 @@
             <a:pPr algn="ctr"/>
             <a:r>
               <a:rPr lang="ru-RU" sz="700" dirty="0"/>
-              <a:t>Династия Орлеанистов</a:t>
+              <a:t>Вернуть Орлеанистов на трон</a:t>
             </a:r>
           </a:p>
         </p:txBody>
@@ -25188,7 +25204,7 @@
         </p:nvSpPr>
         <p:spPr>
           <a:xfrm>
-            <a:off x="7024547" y="5325579"/>
+            <a:off x="5886304" y="3765984"/>
             <a:ext cx="926325" cy="540000"/>
           </a:xfrm>
           <a:prstGeom prst="rect">
@@ -25219,108 +25235,36 @@
           <a:p>
             <a:pPr algn="ctr"/>
             <a:r>
-              <a:rPr lang="ru-RU" sz="700" dirty="0"/>
-              <a:t>Коронация монарха</a:t>
-            </a:r>
-          </a:p>
-        </p:txBody>
-      </p:sp>
-      <p:sp>
-        <p:nvSpPr>
-          <p:cNvPr id="538" name="Прямоугольник 537">
-            <a:extLst>
-              <a:ext uri="{FF2B5EF4-FFF2-40B4-BE49-F238E27FC236}">
-                <a16:creationId xmlns:a16="http://schemas.microsoft.com/office/drawing/2014/main" id="{FB76DE43-3591-4EB8-B4D0-4DB7FE87E242}"/>
-              </a:ext>
-            </a:extLst>
-          </p:cNvPr>
-          <p:cNvSpPr/>
-          <p:nvPr/>
-        </p:nvSpPr>
-        <p:spPr>
-          <a:xfrm>
-            <a:off x="7024546" y="6901319"/>
-            <a:ext cx="926325" cy="540000"/>
-          </a:xfrm>
-          <a:prstGeom prst="rect">
-            <a:avLst/>
-          </a:prstGeom>
-          <a:solidFill>
-            <a:srgbClr val="7030A0"/>
-          </a:solidFill>
-          <a:ln w="19050"/>
-        </p:spPr>
-        <p:style>
-          <a:lnRef idx="2">
-            <a:schemeClr val="accent1"/>
-          </a:lnRef>
-          <a:fillRef idx="1">
-            <a:schemeClr val="lt1"/>
-          </a:fillRef>
-          <a:effectRef idx="0">
-            <a:schemeClr val="accent1"/>
-          </a:effectRef>
-          <a:fontRef idx="minor">
-            <a:schemeClr val="dk1"/>
-          </a:fontRef>
-        </p:style>
-        <p:txBody>
-          <a:bodyPr lIns="124733" tIns="62367" rIns="124733" bIns="62367" rtlCol="0" anchor="ctr"/>
-          <a:lstStyle/>
-          <a:p>
-            <a:pPr algn="ctr"/>
-            <a:r>
-              <a:rPr lang="ru-RU" sz="700" dirty="0"/>
-              <a:t>Династия Легитимистов</a:t>
-            </a:r>
-          </a:p>
-        </p:txBody>
-      </p:sp>
-      <p:cxnSp>
-        <p:nvCxnSpPr>
-          <p:cNvPr id="539" name="Прямая соединительная линия 538">
-            <a:extLst>
-              <a:ext uri="{FF2B5EF4-FFF2-40B4-BE49-F238E27FC236}">
-                <a16:creationId xmlns:a16="http://schemas.microsoft.com/office/drawing/2014/main" id="{C7CF1001-881B-4973-B892-B4BF1ADD398A}"/>
-              </a:ext>
-            </a:extLst>
-          </p:cNvPr>
-          <p:cNvCxnSpPr>
-            <a:cxnSpLocks/>
-            <a:stCxn id="536" idx="3"/>
-            <a:endCxn id="538" idx="1"/>
-          </p:cNvCxnSpPr>
-          <p:nvPr/>
-        </p:nvCxnSpPr>
-        <p:spPr>
-          <a:xfrm>
-            <a:off x="5671046" y="7171319"/>
-            <a:ext cx="1353500" cy="0"/>
-          </a:xfrm>
-          <a:prstGeom prst="line">
-            <a:avLst/>
-          </a:prstGeom>
-          <a:ln w="19050">
-            <a:solidFill>
-              <a:srgbClr val="FF0000"/>
-            </a:solidFill>
-          </a:ln>
-        </p:spPr>
-        <p:style>
-          <a:lnRef idx="1">
-            <a:schemeClr val="accent1"/>
-          </a:lnRef>
-          <a:fillRef idx="0">
-            <a:schemeClr val="accent1"/>
-          </a:fillRef>
-          <a:effectRef idx="0">
-            <a:schemeClr val="accent1"/>
-          </a:effectRef>
-          <a:fontRef idx="minor">
-            <a:schemeClr val="tx1"/>
-          </a:fontRef>
-        </p:style>
-      </p:cxnSp>
+              <a:rPr lang="ru-RU" sz="400" dirty="0"/>
+              <a:t>Гораздо откровеннее высказался Тьерри </a:t>
+            </a:r>
+            <a:r>
+              <a:rPr lang="ru-RU" sz="400" dirty="0" err="1"/>
+              <a:t>Монье</a:t>
+            </a:r>
+            <a:r>
+              <a:rPr lang="ru-RU" sz="400" dirty="0"/>
+              <a:t>, ученик </a:t>
+            </a:r>
+            <a:r>
+              <a:rPr lang="ru-RU" sz="400" dirty="0" err="1"/>
+              <a:t>Морраса</a:t>
+            </a:r>
+            <a:r>
+              <a:rPr lang="ru-RU" sz="400" dirty="0"/>
+              <a:t>, которого многие молодые </a:t>
+            </a:r>
+            <a:r>
+              <a:rPr lang="ru-RU" sz="400" dirty="0" err="1"/>
+              <a:t>моррасианцы</a:t>
+            </a:r>
+            <a:r>
+              <a:rPr lang="ru-RU" sz="400" dirty="0"/>
+              <a:t> считали возможным преемником мэтра в качестве идеолога</a:t>
+            </a:r>
+          </a:p>
+        </p:txBody>
+      </p:sp>
       <p:sp>
         <p:nvSpPr>
           <p:cNvPr id="541" name="Прямоугольник 540">
@@ -26202,7 +26146,7 @@
         </p:nvSpPr>
         <p:spPr>
           <a:xfrm>
-            <a:off x="4744720" y="6146934"/>
+            <a:off x="4672766" y="6901319"/>
             <a:ext cx="926325" cy="540000"/>
           </a:xfrm>
           <a:prstGeom prst="rect">
@@ -26258,7 +26202,7 @@
         </p:nvSpPr>
         <p:spPr>
           <a:xfrm>
-            <a:off x="3601059" y="6150586"/>
+            <a:off x="3460038" y="6901319"/>
             <a:ext cx="926325" cy="540000"/>
           </a:xfrm>
           <a:prstGeom prst="rect">
@@ -26341,9 +26285,9 @@
           <p:nvPr/>
         </p:nvCxnSpPr>
         <p:spPr>
-          <a:xfrm flipV="1">
-            <a:off x="4527384" y="6416934"/>
-            <a:ext cx="217336" cy="3652"/>
+          <a:xfrm>
+            <a:off x="4386363" y="7171319"/>
+            <a:ext cx="286403" cy="0"/>
           </a:xfrm>
           <a:prstGeom prst="line">
             <a:avLst/>
@@ -27008,6 +26952,1035 @@
           </a:p>
         </p:txBody>
       </p:sp>
+      <p:sp>
+        <p:nvSpPr>
+          <p:cNvPr id="558" name="Прямоугольник 557">
+            <a:extLst>
+              <a:ext uri="{FF2B5EF4-FFF2-40B4-BE49-F238E27FC236}">
+                <a16:creationId xmlns:a16="http://schemas.microsoft.com/office/drawing/2014/main" id="{E463D0A0-8EAF-4A5F-9C01-EC8CCD8A6766}"/>
+              </a:ext>
+            </a:extLst>
+          </p:cNvPr>
+          <p:cNvSpPr/>
+          <p:nvPr/>
+        </p:nvSpPr>
+        <p:spPr>
+          <a:xfrm>
+            <a:off x="2846543" y="6114596"/>
+            <a:ext cx="926325" cy="540000"/>
+          </a:xfrm>
+          <a:prstGeom prst="rect">
+            <a:avLst/>
+          </a:prstGeom>
+          <a:solidFill>
+            <a:srgbClr val="7030A0"/>
+          </a:solidFill>
+          <a:ln w="19050"/>
+        </p:spPr>
+        <p:style>
+          <a:lnRef idx="2">
+            <a:schemeClr val="accent1"/>
+          </a:lnRef>
+          <a:fillRef idx="1">
+            <a:schemeClr val="lt1"/>
+          </a:fillRef>
+          <a:effectRef idx="0">
+            <a:schemeClr val="accent1"/>
+          </a:effectRef>
+          <a:fontRef idx="minor">
+            <a:schemeClr val="dk1"/>
+          </a:fontRef>
+        </p:style>
+        <p:txBody>
+          <a:bodyPr lIns="124733" tIns="62367" rIns="124733" bIns="62367" rtlCol="0" anchor="ctr"/>
+          <a:lstStyle/>
+          <a:p>
+            <a:pPr algn="ctr"/>
+            <a:r>
+              <a:rPr lang="ru-RU" sz="700" dirty="0"/>
+              <a:t>Провести децентрализацию Франции</a:t>
+            </a:r>
+          </a:p>
+          <a:p>
+            <a:pPr algn="ctr"/>
+            <a:r>
+              <a:rPr lang="ru-RU" sz="200" dirty="0"/>
+              <a:t>(Децентрализация: возвращение историческим провинциям Франции широкого самоуправления в культурных и хозяйственных вопросах при сильной центральной власти короля.)</a:t>
+            </a:r>
+            <a:endParaRPr lang="ru-RU" sz="700" dirty="0"/>
+          </a:p>
+        </p:txBody>
+      </p:sp>
+      <p:sp>
+        <p:nvSpPr>
+          <p:cNvPr id="567" name="Прямоугольник 566">
+            <a:extLst>
+              <a:ext uri="{FF2B5EF4-FFF2-40B4-BE49-F238E27FC236}">
+                <a16:creationId xmlns:a16="http://schemas.microsoft.com/office/drawing/2014/main" id="{035A6F00-570A-43DB-8266-5E6B62FD44ED}"/>
+              </a:ext>
+            </a:extLst>
+          </p:cNvPr>
+          <p:cNvSpPr/>
+          <p:nvPr/>
+        </p:nvSpPr>
+        <p:spPr>
+          <a:xfrm>
+            <a:off x="5198465" y="5339085"/>
+            <a:ext cx="926325" cy="540000"/>
+          </a:xfrm>
+          <a:prstGeom prst="rect">
+            <a:avLst/>
+          </a:prstGeom>
+          <a:solidFill>
+            <a:srgbClr val="7030A0"/>
+          </a:solidFill>
+          <a:ln w="19050"/>
+        </p:spPr>
+        <p:style>
+          <a:lnRef idx="2">
+            <a:schemeClr val="accent1"/>
+          </a:lnRef>
+          <a:fillRef idx="1">
+            <a:schemeClr val="lt1"/>
+          </a:fillRef>
+          <a:effectRef idx="0">
+            <a:schemeClr val="accent1"/>
+          </a:effectRef>
+          <a:fontRef idx="minor">
+            <a:schemeClr val="dk1"/>
+          </a:fontRef>
+        </p:style>
+        <p:txBody>
+          <a:bodyPr lIns="124733" tIns="62367" rIns="124733" bIns="62367" rtlCol="0" anchor="ctr"/>
+          <a:lstStyle/>
+          <a:p>
+            <a:pPr algn="ctr"/>
+            <a:r>
+              <a:rPr lang="ru-RU" sz="700" dirty="0"/>
+              <a:t>Борьба против 4 чуждых сословий </a:t>
+            </a:r>
+            <a:r>
+              <a:rPr lang="ru-RU" sz="200" dirty="0"/>
+              <a:t>(Антисемитизм и ксенофобия: борьба против так называемых «четырех чуждых сословий» (евреев, протестантов, масонов и иностранцев/мигрантов), которых обвиняли в разрушении Франции.)</a:t>
+            </a:r>
+            <a:endParaRPr lang="ru-RU" sz="700" dirty="0"/>
+          </a:p>
+        </p:txBody>
+      </p:sp>
+      <p:sp>
+        <p:nvSpPr>
+          <p:cNvPr id="571" name="Прямоугольник 570">
+            <a:extLst>
+              <a:ext uri="{FF2B5EF4-FFF2-40B4-BE49-F238E27FC236}">
+                <a16:creationId xmlns:a16="http://schemas.microsoft.com/office/drawing/2014/main" id="{9ADE7CE1-D052-46F4-BF7B-02BE06B63370}"/>
+              </a:ext>
+            </a:extLst>
+          </p:cNvPr>
+          <p:cNvSpPr/>
+          <p:nvPr/>
+        </p:nvSpPr>
+        <p:spPr>
+          <a:xfrm>
+            <a:off x="2845831" y="5339085"/>
+            <a:ext cx="926325" cy="540000"/>
+          </a:xfrm>
+          <a:prstGeom prst="rect">
+            <a:avLst/>
+          </a:prstGeom>
+          <a:solidFill>
+            <a:srgbClr val="7030A0"/>
+          </a:solidFill>
+          <a:ln w="19050"/>
+        </p:spPr>
+        <p:style>
+          <a:lnRef idx="2">
+            <a:schemeClr val="accent1"/>
+          </a:lnRef>
+          <a:fillRef idx="1">
+            <a:schemeClr val="lt1"/>
+          </a:fillRef>
+          <a:effectRef idx="0">
+            <a:schemeClr val="accent1"/>
+          </a:effectRef>
+          <a:fontRef idx="minor">
+            <a:schemeClr val="dk1"/>
+          </a:fontRef>
+        </p:style>
+        <p:txBody>
+          <a:bodyPr lIns="124733" tIns="62367" rIns="124733" bIns="62367" rtlCol="0" anchor="ctr"/>
+          <a:lstStyle/>
+          <a:p>
+            <a:pPr algn="ctr"/>
+            <a:r>
+              <a:rPr lang="ru-RU" sz="700" dirty="0"/>
+              <a:t>Построить органическое общество</a:t>
+            </a:r>
+          </a:p>
+          <a:p>
+            <a:pPr algn="ctr"/>
+            <a:r>
+              <a:rPr lang="ru-RU" sz="200" dirty="0"/>
+              <a:t>(Органическое строение общества: государство видится не союзом свободных индивидов, а иерархической системой из традиционных ячеек — семей, профессиональных гильдий и исторических провинций.)</a:t>
+            </a:r>
+            <a:endParaRPr lang="ru-RU" sz="700" dirty="0"/>
+          </a:p>
+        </p:txBody>
+      </p:sp>
+      <p:sp>
+        <p:nvSpPr>
+          <p:cNvPr id="572" name="Прямоугольник 571">
+            <a:extLst>
+              <a:ext uri="{FF2B5EF4-FFF2-40B4-BE49-F238E27FC236}">
+                <a16:creationId xmlns:a16="http://schemas.microsoft.com/office/drawing/2014/main" id="{1A4F76F9-0A0F-473E-BBBB-B010700B50CF}"/>
+              </a:ext>
+            </a:extLst>
+          </p:cNvPr>
+          <p:cNvSpPr/>
+          <p:nvPr/>
+        </p:nvSpPr>
+        <p:spPr>
+          <a:xfrm>
+            <a:off x="8314872" y="6114596"/>
+            <a:ext cx="926325" cy="540000"/>
+          </a:xfrm>
+          <a:prstGeom prst="rect">
+            <a:avLst/>
+          </a:prstGeom>
+          <a:solidFill>
+            <a:srgbClr val="7030A0"/>
+          </a:solidFill>
+          <a:ln w="19050"/>
+        </p:spPr>
+        <p:style>
+          <a:lnRef idx="2">
+            <a:schemeClr val="accent1"/>
+          </a:lnRef>
+          <a:fillRef idx="1">
+            <a:schemeClr val="lt1"/>
+          </a:fillRef>
+          <a:effectRef idx="0">
+            <a:schemeClr val="accent1"/>
+          </a:effectRef>
+          <a:fontRef idx="minor">
+            <a:schemeClr val="dk1"/>
+          </a:fontRef>
+        </p:style>
+        <p:txBody>
+          <a:bodyPr lIns="124733" tIns="62367" rIns="124733" bIns="62367" rtlCol="0" anchor="ctr"/>
+          <a:lstStyle/>
+          <a:p>
+            <a:pPr algn="ctr"/>
+            <a:r>
+              <a:rPr lang="ru-RU" sz="700" dirty="0"/>
+              <a:t>Нанести превентивный удар по боши</a:t>
+            </a:r>
+          </a:p>
+        </p:txBody>
+      </p:sp>
+      <p:sp>
+        <p:nvSpPr>
+          <p:cNvPr id="573" name="Прямоугольник 572">
+            <a:extLst>
+              <a:ext uri="{FF2B5EF4-FFF2-40B4-BE49-F238E27FC236}">
+                <a16:creationId xmlns:a16="http://schemas.microsoft.com/office/drawing/2014/main" id="{DEB3ECA9-20F0-4E54-8BEF-0B92631FE2C6}"/>
+              </a:ext>
+            </a:extLst>
+          </p:cNvPr>
+          <p:cNvSpPr/>
+          <p:nvPr/>
+        </p:nvSpPr>
+        <p:spPr>
+          <a:xfrm>
+            <a:off x="8314871" y="5325579"/>
+            <a:ext cx="926325" cy="540000"/>
+          </a:xfrm>
+          <a:prstGeom prst="rect">
+            <a:avLst/>
+          </a:prstGeom>
+          <a:solidFill>
+            <a:srgbClr val="7030A0"/>
+          </a:solidFill>
+          <a:ln w="19050"/>
+        </p:spPr>
+        <p:style>
+          <a:lnRef idx="2">
+            <a:schemeClr val="accent1"/>
+          </a:lnRef>
+          <a:fillRef idx="1">
+            <a:schemeClr val="lt1"/>
+          </a:fillRef>
+          <a:effectRef idx="0">
+            <a:schemeClr val="accent1"/>
+          </a:effectRef>
+          <a:fontRef idx="minor">
+            <a:schemeClr val="dk1"/>
+          </a:fontRef>
+        </p:style>
+        <p:txBody>
+          <a:bodyPr lIns="124733" tIns="62367" rIns="124733" bIns="62367" rtlCol="0" anchor="ctr"/>
+          <a:lstStyle/>
+          <a:p>
+            <a:pPr algn="ctr"/>
+            <a:r>
+              <a:rPr lang="ru-RU" sz="700" dirty="0"/>
+              <a:t>Агрессивный суверенитет</a:t>
+            </a:r>
+          </a:p>
+        </p:txBody>
+      </p:sp>
+      <p:sp>
+        <p:nvSpPr>
+          <p:cNvPr id="580" name="Прямоугольник 579">
+            <a:extLst>
+              <a:ext uri="{FF2B5EF4-FFF2-40B4-BE49-F238E27FC236}">
+                <a16:creationId xmlns:a16="http://schemas.microsoft.com/office/drawing/2014/main" id="{EC2FE5DE-A838-444E-8339-45CC12816E3C}"/>
+              </a:ext>
+            </a:extLst>
+          </p:cNvPr>
+          <p:cNvSpPr/>
+          <p:nvPr/>
+        </p:nvSpPr>
+        <p:spPr>
+          <a:xfrm>
+            <a:off x="9465369" y="6123851"/>
+            <a:ext cx="926325" cy="540000"/>
+          </a:xfrm>
+          <a:prstGeom prst="rect">
+            <a:avLst/>
+          </a:prstGeom>
+          <a:solidFill>
+            <a:srgbClr val="7030A0"/>
+          </a:solidFill>
+          <a:ln w="19050"/>
+        </p:spPr>
+        <p:style>
+          <a:lnRef idx="2">
+            <a:schemeClr val="accent1"/>
+          </a:lnRef>
+          <a:fillRef idx="1">
+            <a:schemeClr val="lt1"/>
+          </a:fillRef>
+          <a:effectRef idx="0">
+            <a:schemeClr val="accent1"/>
+          </a:effectRef>
+          <a:fontRef idx="minor">
+            <a:schemeClr val="dk1"/>
+          </a:fontRef>
+        </p:style>
+        <p:txBody>
+          <a:bodyPr lIns="124733" tIns="62367" rIns="124733" bIns="62367" rtlCol="0" anchor="ctr"/>
+          <a:lstStyle/>
+          <a:p>
+            <a:pPr algn="ctr"/>
+            <a:r>
+              <a:rPr lang="ru-RU" sz="700" dirty="0"/>
+              <a:t>Разобраться с красным врагом</a:t>
+            </a:r>
+          </a:p>
+        </p:txBody>
+      </p:sp>
+      <p:cxnSp>
+        <p:nvCxnSpPr>
+          <p:cNvPr id="581" name="Соединительная линия уступом 620">
+            <a:extLst>
+              <a:ext uri="{FF2B5EF4-FFF2-40B4-BE49-F238E27FC236}">
+                <a16:creationId xmlns:a16="http://schemas.microsoft.com/office/drawing/2014/main" id="{47FE05A2-D98A-40D0-946D-20E17870A61D}"/>
+              </a:ext>
+            </a:extLst>
+          </p:cNvPr>
+          <p:cNvCxnSpPr>
+            <a:cxnSpLocks/>
+            <a:stCxn id="197" idx="2"/>
+            <a:endCxn id="567" idx="0"/>
+          </p:cNvCxnSpPr>
+          <p:nvPr/>
+        </p:nvCxnSpPr>
+        <p:spPr>
+          <a:xfrm rot="5400000">
+            <a:off x="5882632" y="4868605"/>
+            <a:ext cx="249477" cy="691483"/>
+          </a:xfrm>
+          <a:prstGeom prst="bentConnector3">
+            <a:avLst>
+              <a:gd name="adj1" fmla="val 50000"/>
+            </a:avLst>
+          </a:prstGeom>
+          <a:ln w="19050">
+            <a:tailEnd type="arrow"/>
+          </a:ln>
+        </p:spPr>
+        <p:style>
+          <a:lnRef idx="1">
+            <a:schemeClr val="accent1"/>
+          </a:lnRef>
+          <a:fillRef idx="0">
+            <a:schemeClr val="accent1"/>
+          </a:fillRef>
+          <a:effectRef idx="0">
+            <a:schemeClr val="accent1"/>
+          </a:effectRef>
+          <a:fontRef idx="minor">
+            <a:schemeClr val="tx1"/>
+          </a:fontRef>
+        </p:style>
+      </p:cxnSp>
+      <p:cxnSp>
+        <p:nvCxnSpPr>
+          <p:cNvPr id="584" name="Соединительная линия уступом 620">
+            <a:extLst>
+              <a:ext uri="{FF2B5EF4-FFF2-40B4-BE49-F238E27FC236}">
+                <a16:creationId xmlns:a16="http://schemas.microsoft.com/office/drawing/2014/main" id="{0EF1282A-3DDA-4CF1-BD6D-4A39C8874BCB}"/>
+              </a:ext>
+            </a:extLst>
+          </p:cNvPr>
+          <p:cNvCxnSpPr>
+            <a:cxnSpLocks/>
+            <a:stCxn id="197" idx="2"/>
+            <a:endCxn id="571" idx="0"/>
+          </p:cNvCxnSpPr>
+          <p:nvPr/>
+        </p:nvCxnSpPr>
+        <p:spPr>
+          <a:xfrm rot="5400000">
+            <a:off x="4706315" y="3692288"/>
+            <a:ext cx="249477" cy="3044117"/>
+          </a:xfrm>
+          <a:prstGeom prst="bentConnector3">
+            <a:avLst>
+              <a:gd name="adj1" fmla="val 50000"/>
+            </a:avLst>
+          </a:prstGeom>
+          <a:ln w="19050">
+            <a:tailEnd type="arrow"/>
+          </a:ln>
+        </p:spPr>
+        <p:style>
+          <a:lnRef idx="1">
+            <a:schemeClr val="accent1"/>
+          </a:lnRef>
+          <a:fillRef idx="0">
+            <a:schemeClr val="accent1"/>
+          </a:fillRef>
+          <a:effectRef idx="0">
+            <a:schemeClr val="accent1"/>
+          </a:effectRef>
+          <a:fontRef idx="minor">
+            <a:schemeClr val="tx1"/>
+          </a:fontRef>
+        </p:style>
+      </p:cxnSp>
+      <p:cxnSp>
+        <p:nvCxnSpPr>
+          <p:cNvPr id="586" name="Соединительная линия уступом 620">
+            <a:extLst>
+              <a:ext uri="{FF2B5EF4-FFF2-40B4-BE49-F238E27FC236}">
+                <a16:creationId xmlns:a16="http://schemas.microsoft.com/office/drawing/2014/main" id="{692D82BB-7FBC-4C3F-B42C-D190D1705E3E}"/>
+              </a:ext>
+            </a:extLst>
+          </p:cNvPr>
+          <p:cNvCxnSpPr>
+            <a:cxnSpLocks/>
+            <a:stCxn id="197" idx="2"/>
+            <a:endCxn id="535" idx="0"/>
+          </p:cNvCxnSpPr>
+          <p:nvPr/>
+        </p:nvCxnSpPr>
+        <p:spPr>
+          <a:xfrm rot="16200000" flipH="1">
+            <a:off x="6576385" y="4866333"/>
+            <a:ext cx="242492" cy="689041"/>
+          </a:xfrm>
+          <a:prstGeom prst="bentConnector3">
+            <a:avLst>
+              <a:gd name="adj1" fmla="val 50000"/>
+            </a:avLst>
+          </a:prstGeom>
+          <a:ln w="19050">
+            <a:tailEnd type="arrow"/>
+          </a:ln>
+        </p:spPr>
+        <p:style>
+          <a:lnRef idx="1">
+            <a:schemeClr val="accent1"/>
+          </a:lnRef>
+          <a:fillRef idx="0">
+            <a:schemeClr val="accent1"/>
+          </a:fillRef>
+          <a:effectRef idx="0">
+            <a:schemeClr val="accent1"/>
+          </a:effectRef>
+          <a:fontRef idx="minor">
+            <a:schemeClr val="tx1"/>
+          </a:fontRef>
+        </p:style>
+      </p:cxnSp>
+      <p:cxnSp>
+        <p:nvCxnSpPr>
+          <p:cNvPr id="587" name="Соединительная линия уступом 620">
+            <a:extLst>
+              <a:ext uri="{FF2B5EF4-FFF2-40B4-BE49-F238E27FC236}">
+                <a16:creationId xmlns:a16="http://schemas.microsoft.com/office/drawing/2014/main" id="{3EDA691D-A7A2-4887-8383-88F68405866E}"/>
+              </a:ext>
+            </a:extLst>
+          </p:cNvPr>
+          <p:cNvCxnSpPr>
+            <a:cxnSpLocks/>
+            <a:stCxn id="197" idx="2"/>
+            <a:endCxn id="573" idx="0"/>
+          </p:cNvCxnSpPr>
+          <p:nvPr/>
+        </p:nvCxnSpPr>
+        <p:spPr>
+          <a:xfrm rot="16200000" flipH="1">
+            <a:off x="7447587" y="3995131"/>
+            <a:ext cx="235971" cy="2424923"/>
+          </a:xfrm>
+          <a:prstGeom prst="bentConnector3">
+            <a:avLst>
+              <a:gd name="adj1" fmla="val 50000"/>
+            </a:avLst>
+          </a:prstGeom>
+          <a:ln w="19050">
+            <a:tailEnd type="arrow"/>
+          </a:ln>
+        </p:spPr>
+        <p:style>
+          <a:lnRef idx="1">
+            <a:schemeClr val="accent1"/>
+          </a:lnRef>
+          <a:fillRef idx="0">
+            <a:schemeClr val="accent1"/>
+          </a:fillRef>
+          <a:effectRef idx="0">
+            <a:schemeClr val="accent1"/>
+          </a:effectRef>
+          <a:fontRef idx="minor">
+            <a:schemeClr val="tx1"/>
+          </a:fontRef>
+        </p:style>
+      </p:cxnSp>
+      <p:cxnSp>
+        <p:nvCxnSpPr>
+          <p:cNvPr id="589" name="Соединительная линия уступом 620">
+            <a:extLst>
+              <a:ext uri="{FF2B5EF4-FFF2-40B4-BE49-F238E27FC236}">
+                <a16:creationId xmlns:a16="http://schemas.microsoft.com/office/drawing/2014/main" id="{30E175F2-93CE-4FF7-87CB-9BB87197002B}"/>
+              </a:ext>
+            </a:extLst>
+          </p:cNvPr>
+          <p:cNvCxnSpPr>
+            <a:cxnSpLocks/>
+            <a:stCxn id="197" idx="2"/>
+            <a:endCxn id="477" idx="0"/>
+          </p:cNvCxnSpPr>
+          <p:nvPr/>
+        </p:nvCxnSpPr>
+        <p:spPr>
+          <a:xfrm rot="16200000" flipH="1">
+            <a:off x="8025394" y="3417324"/>
+            <a:ext cx="230855" cy="3575421"/>
+          </a:xfrm>
+          <a:prstGeom prst="bentConnector3">
+            <a:avLst>
+              <a:gd name="adj1" fmla="val 50000"/>
+            </a:avLst>
+          </a:prstGeom>
+          <a:ln w="19050">
+            <a:tailEnd type="arrow"/>
+          </a:ln>
+        </p:spPr>
+        <p:style>
+          <a:lnRef idx="1">
+            <a:schemeClr val="accent1"/>
+          </a:lnRef>
+          <a:fillRef idx="0">
+            <a:schemeClr val="accent1"/>
+          </a:fillRef>
+          <a:effectRef idx="0">
+            <a:schemeClr val="accent1"/>
+          </a:effectRef>
+          <a:fontRef idx="minor">
+            <a:schemeClr val="tx1"/>
+          </a:fontRef>
+        </p:style>
+      </p:cxnSp>
+      <p:cxnSp>
+        <p:nvCxnSpPr>
+          <p:cNvPr id="591" name="Соединительная линия уступом 620">
+            <a:extLst>
+              <a:ext uri="{FF2B5EF4-FFF2-40B4-BE49-F238E27FC236}">
+                <a16:creationId xmlns:a16="http://schemas.microsoft.com/office/drawing/2014/main" id="{E425ABD8-FC10-465B-8F5B-FD43C96B2F26}"/>
+              </a:ext>
+            </a:extLst>
+          </p:cNvPr>
+          <p:cNvCxnSpPr>
+            <a:cxnSpLocks/>
+            <a:stCxn id="571" idx="2"/>
+            <a:endCxn id="558" idx="0"/>
+          </p:cNvCxnSpPr>
+          <p:nvPr/>
+        </p:nvCxnSpPr>
+        <p:spPr>
+          <a:xfrm rot="16200000" flipH="1">
+            <a:off x="3191595" y="5996484"/>
+            <a:ext cx="235511" cy="712"/>
+          </a:xfrm>
+          <a:prstGeom prst="bentConnector3">
+            <a:avLst>
+              <a:gd name="adj1" fmla="val 50000"/>
+            </a:avLst>
+          </a:prstGeom>
+          <a:ln w="19050">
+            <a:tailEnd type="arrow"/>
+          </a:ln>
+        </p:spPr>
+        <p:style>
+          <a:lnRef idx="1">
+            <a:schemeClr val="accent1"/>
+          </a:lnRef>
+          <a:fillRef idx="0">
+            <a:schemeClr val="accent1"/>
+          </a:fillRef>
+          <a:effectRef idx="0">
+            <a:schemeClr val="accent1"/>
+          </a:effectRef>
+          <a:fontRef idx="minor">
+            <a:schemeClr val="tx1"/>
+          </a:fontRef>
+        </p:style>
+      </p:cxnSp>
+      <p:cxnSp>
+        <p:nvCxnSpPr>
+          <p:cNvPr id="592" name="Соединительная линия уступом 620">
+            <a:extLst>
+              <a:ext uri="{FF2B5EF4-FFF2-40B4-BE49-F238E27FC236}">
+                <a16:creationId xmlns:a16="http://schemas.microsoft.com/office/drawing/2014/main" id="{558FA2D2-F308-4817-9080-654EF2A61C7F}"/>
+              </a:ext>
+            </a:extLst>
+          </p:cNvPr>
+          <p:cNvCxnSpPr>
+            <a:cxnSpLocks/>
+            <a:stCxn id="571" idx="2"/>
+            <a:endCxn id="517" idx="0"/>
+          </p:cNvCxnSpPr>
+          <p:nvPr/>
+        </p:nvCxnSpPr>
+        <p:spPr>
+          <a:xfrm rot="16200000" flipH="1">
+            <a:off x="3798721" y="5389358"/>
+            <a:ext cx="241117" cy="1220570"/>
+          </a:xfrm>
+          <a:prstGeom prst="bentConnector3">
+            <a:avLst>
+              <a:gd name="adj1" fmla="val 50000"/>
+            </a:avLst>
+          </a:prstGeom>
+          <a:ln w="19050">
+            <a:tailEnd type="arrow"/>
+          </a:ln>
+        </p:spPr>
+        <p:style>
+          <a:lnRef idx="1">
+            <a:schemeClr val="accent1"/>
+          </a:lnRef>
+          <a:fillRef idx="0">
+            <a:schemeClr val="accent1"/>
+          </a:fillRef>
+          <a:effectRef idx="0">
+            <a:schemeClr val="accent1"/>
+          </a:effectRef>
+          <a:fontRef idx="minor">
+            <a:schemeClr val="tx1"/>
+          </a:fontRef>
+        </p:style>
+      </p:cxnSp>
+      <p:cxnSp>
+        <p:nvCxnSpPr>
+          <p:cNvPr id="593" name="Соединительная линия уступом 620">
+            <a:extLst>
+              <a:ext uri="{FF2B5EF4-FFF2-40B4-BE49-F238E27FC236}">
+                <a16:creationId xmlns:a16="http://schemas.microsoft.com/office/drawing/2014/main" id="{3427BF40-95D3-45BB-A3B3-9E0E87D308F8}"/>
+              </a:ext>
+            </a:extLst>
+          </p:cNvPr>
+          <p:cNvCxnSpPr>
+            <a:cxnSpLocks/>
+            <a:stCxn id="517" idx="2"/>
+            <a:endCxn id="560" idx="0"/>
+          </p:cNvCxnSpPr>
+          <p:nvPr/>
+        </p:nvCxnSpPr>
+        <p:spPr>
+          <a:xfrm rot="16200000" flipH="1">
+            <a:off x="4712188" y="6477577"/>
+            <a:ext cx="241117" cy="606365"/>
+          </a:xfrm>
+          <a:prstGeom prst="bentConnector3">
+            <a:avLst>
+              <a:gd name="adj1" fmla="val 50000"/>
+            </a:avLst>
+          </a:prstGeom>
+          <a:ln w="19050">
+            <a:tailEnd type="arrow"/>
+          </a:ln>
+        </p:spPr>
+        <p:style>
+          <a:lnRef idx="1">
+            <a:schemeClr val="accent1"/>
+          </a:lnRef>
+          <a:fillRef idx="0">
+            <a:schemeClr val="accent1"/>
+          </a:fillRef>
+          <a:effectRef idx="0">
+            <a:schemeClr val="accent1"/>
+          </a:effectRef>
+          <a:fontRef idx="minor">
+            <a:schemeClr val="tx1"/>
+          </a:fontRef>
+        </p:style>
+      </p:cxnSp>
+      <p:cxnSp>
+        <p:nvCxnSpPr>
+          <p:cNvPr id="594" name="Соединительная линия уступом 620">
+            <a:extLst>
+              <a:ext uri="{FF2B5EF4-FFF2-40B4-BE49-F238E27FC236}">
+                <a16:creationId xmlns:a16="http://schemas.microsoft.com/office/drawing/2014/main" id="{D89C33B3-6292-4628-870A-D465F85B92E4}"/>
+              </a:ext>
+            </a:extLst>
+          </p:cNvPr>
+          <p:cNvCxnSpPr>
+            <a:cxnSpLocks/>
+            <a:stCxn id="517" idx="2"/>
+            <a:endCxn id="561" idx="0"/>
+          </p:cNvCxnSpPr>
+          <p:nvPr/>
+        </p:nvCxnSpPr>
+        <p:spPr>
+          <a:xfrm rot="5400000">
+            <a:off x="4105825" y="6477579"/>
+            <a:ext cx="241117" cy="606363"/>
+          </a:xfrm>
+          <a:prstGeom prst="bentConnector3">
+            <a:avLst>
+              <a:gd name="adj1" fmla="val 50000"/>
+            </a:avLst>
+          </a:prstGeom>
+          <a:ln w="19050">
+            <a:tailEnd type="arrow"/>
+          </a:ln>
+        </p:spPr>
+        <p:style>
+          <a:lnRef idx="1">
+            <a:schemeClr val="accent1"/>
+          </a:lnRef>
+          <a:fillRef idx="0">
+            <a:schemeClr val="accent1"/>
+          </a:fillRef>
+          <a:effectRef idx="0">
+            <a:schemeClr val="accent1"/>
+          </a:effectRef>
+          <a:fontRef idx="minor">
+            <a:schemeClr val="tx1"/>
+          </a:fontRef>
+        </p:style>
+      </p:cxnSp>
+      <p:cxnSp>
+        <p:nvCxnSpPr>
+          <p:cNvPr id="595" name="Соединительная линия уступом 620">
+            <a:extLst>
+              <a:ext uri="{FF2B5EF4-FFF2-40B4-BE49-F238E27FC236}">
+                <a16:creationId xmlns:a16="http://schemas.microsoft.com/office/drawing/2014/main" id="{A3CF6517-1671-4FA3-8D19-8C81AE239CD8}"/>
+              </a:ext>
+            </a:extLst>
+          </p:cNvPr>
+          <p:cNvCxnSpPr>
+            <a:cxnSpLocks/>
+            <a:stCxn id="567" idx="2"/>
+            <a:endCxn id="536" idx="0"/>
+          </p:cNvCxnSpPr>
+          <p:nvPr/>
+        </p:nvCxnSpPr>
+        <p:spPr>
+          <a:xfrm rot="16200000" flipH="1">
+            <a:off x="5875121" y="5665592"/>
+            <a:ext cx="259785" cy="686770"/>
+          </a:xfrm>
+          <a:prstGeom prst="bentConnector3">
+            <a:avLst>
+              <a:gd name="adj1" fmla="val 50000"/>
+            </a:avLst>
+          </a:prstGeom>
+          <a:ln w="19050">
+            <a:tailEnd type="arrow"/>
+          </a:ln>
+        </p:spPr>
+        <p:style>
+          <a:lnRef idx="1">
+            <a:schemeClr val="accent1"/>
+          </a:lnRef>
+          <a:fillRef idx="0">
+            <a:schemeClr val="accent1"/>
+          </a:fillRef>
+          <a:effectRef idx="0">
+            <a:schemeClr val="accent1"/>
+          </a:effectRef>
+          <a:fontRef idx="minor">
+            <a:schemeClr val="tx1"/>
+          </a:fontRef>
+        </p:style>
+      </p:cxnSp>
+      <p:cxnSp>
+        <p:nvCxnSpPr>
+          <p:cNvPr id="596" name="Соединительная линия уступом 620">
+            <a:extLst>
+              <a:ext uri="{FF2B5EF4-FFF2-40B4-BE49-F238E27FC236}">
+                <a16:creationId xmlns:a16="http://schemas.microsoft.com/office/drawing/2014/main" id="{988080B1-73C9-4F14-BF5E-BBA1527B5C76}"/>
+              </a:ext>
+            </a:extLst>
+          </p:cNvPr>
+          <p:cNvCxnSpPr>
+            <a:cxnSpLocks/>
+            <a:stCxn id="535" idx="2"/>
+            <a:endCxn id="536" idx="0"/>
+          </p:cNvCxnSpPr>
+          <p:nvPr/>
+        </p:nvCxnSpPr>
+        <p:spPr>
+          <a:xfrm rot="5400000">
+            <a:off x="6561890" y="5658608"/>
+            <a:ext cx="266770" cy="693754"/>
+          </a:xfrm>
+          <a:prstGeom prst="bentConnector3">
+            <a:avLst>
+              <a:gd name="adj1" fmla="val 50000"/>
+            </a:avLst>
+          </a:prstGeom>
+          <a:ln w="19050">
+            <a:tailEnd type="arrow"/>
+          </a:ln>
+        </p:spPr>
+        <p:style>
+          <a:lnRef idx="1">
+            <a:schemeClr val="accent1"/>
+          </a:lnRef>
+          <a:fillRef idx="0">
+            <a:schemeClr val="accent1"/>
+          </a:fillRef>
+          <a:effectRef idx="0">
+            <a:schemeClr val="accent1"/>
+          </a:effectRef>
+          <a:fontRef idx="minor">
+            <a:schemeClr val="tx1"/>
+          </a:fontRef>
+        </p:style>
+      </p:cxnSp>
+      <p:sp>
+        <p:nvSpPr>
+          <p:cNvPr id="597" name="Прямоугольник 596">
+            <a:extLst>
+              <a:ext uri="{FF2B5EF4-FFF2-40B4-BE49-F238E27FC236}">
+                <a16:creationId xmlns:a16="http://schemas.microsoft.com/office/drawing/2014/main" id="{5AE3213E-9309-4963-89E3-B7060DCFF7AD}"/>
+              </a:ext>
+            </a:extLst>
+          </p:cNvPr>
+          <p:cNvSpPr/>
+          <p:nvPr/>
+        </p:nvSpPr>
+        <p:spPr>
+          <a:xfrm>
+            <a:off x="5884742" y="6908534"/>
+            <a:ext cx="926325" cy="540000"/>
+          </a:xfrm>
+          <a:prstGeom prst="rect">
+            <a:avLst/>
+          </a:prstGeom>
+          <a:solidFill>
+            <a:srgbClr val="7030A0"/>
+          </a:solidFill>
+          <a:ln w="19050"/>
+        </p:spPr>
+        <p:style>
+          <a:lnRef idx="2">
+            <a:schemeClr val="accent1"/>
+          </a:lnRef>
+          <a:fillRef idx="1">
+            <a:schemeClr val="lt1"/>
+          </a:fillRef>
+          <a:effectRef idx="0">
+            <a:schemeClr val="accent1"/>
+          </a:effectRef>
+          <a:fontRef idx="minor">
+            <a:schemeClr val="dk1"/>
+          </a:fontRef>
+        </p:style>
+        <p:txBody>
+          <a:bodyPr lIns="124733" tIns="62367" rIns="124733" bIns="62367" rtlCol="0" anchor="ctr"/>
+          <a:lstStyle/>
+          <a:p>
+            <a:pPr algn="ctr"/>
+            <a:r>
+              <a:rPr lang="ru-RU" sz="700" dirty="0"/>
+              <a:t>Передать высшую власть королю</a:t>
+            </a:r>
+          </a:p>
+          <a:p>
+            <a:pPr algn="ctr"/>
+            <a:r>
+              <a:rPr lang="ru-RU" sz="200" dirty="0"/>
+              <a:t>(Децентрализованная власть: парадоксальный лозунг движения звучал так: «Король в своих советах, народ в своих палатах». Король забирает себе только высшие функции (армию, внешнюю политику, высший суд), но возвращает старым провинциям и городам полное самоуправление в местных, хозяйственных и культурных делах.)</a:t>
+            </a:r>
+            <a:endParaRPr lang="ru-RU" sz="700" dirty="0"/>
+          </a:p>
+        </p:txBody>
+      </p:sp>
+      <p:cxnSp>
+        <p:nvCxnSpPr>
+          <p:cNvPr id="598" name="Соединительная линия уступом 620">
+            <a:extLst>
+              <a:ext uri="{FF2B5EF4-FFF2-40B4-BE49-F238E27FC236}">
+                <a16:creationId xmlns:a16="http://schemas.microsoft.com/office/drawing/2014/main" id="{E0793CCB-0E88-478C-9EDE-CE1E65F65345}"/>
+              </a:ext>
+            </a:extLst>
+          </p:cNvPr>
+          <p:cNvCxnSpPr>
+            <a:cxnSpLocks/>
+            <a:stCxn id="536" idx="2"/>
+            <a:endCxn id="597" idx="0"/>
+          </p:cNvCxnSpPr>
+          <p:nvPr/>
+        </p:nvCxnSpPr>
+        <p:spPr>
+          <a:xfrm rot="5400000">
+            <a:off x="6233320" y="6793456"/>
+            <a:ext cx="229664" cy="493"/>
+          </a:xfrm>
+          <a:prstGeom prst="bentConnector3">
+            <a:avLst>
+              <a:gd name="adj1" fmla="val 50000"/>
+            </a:avLst>
+          </a:prstGeom>
+          <a:ln w="19050">
+            <a:tailEnd type="arrow"/>
+          </a:ln>
+        </p:spPr>
+        <p:style>
+          <a:lnRef idx="1">
+            <a:schemeClr val="accent1"/>
+          </a:lnRef>
+          <a:fillRef idx="0">
+            <a:schemeClr val="accent1"/>
+          </a:fillRef>
+          <a:effectRef idx="0">
+            <a:schemeClr val="accent1"/>
+          </a:effectRef>
+          <a:fontRef idx="minor">
+            <a:schemeClr val="tx1"/>
+          </a:fontRef>
+        </p:style>
+      </p:cxnSp>
+      <p:sp>
+        <p:nvSpPr>
+          <p:cNvPr id="599" name="Прямоугольник 598">
+            <a:extLst>
+              <a:ext uri="{FF2B5EF4-FFF2-40B4-BE49-F238E27FC236}">
+                <a16:creationId xmlns:a16="http://schemas.microsoft.com/office/drawing/2014/main" id="{E5A5042E-9F55-4E3E-9D41-604CDEFEBCCF}"/>
+              </a:ext>
+            </a:extLst>
+          </p:cNvPr>
+          <p:cNvSpPr/>
+          <p:nvPr/>
+        </p:nvSpPr>
+        <p:spPr>
+          <a:xfrm>
+            <a:off x="1626685" y="6119076"/>
+            <a:ext cx="926325" cy="540000"/>
+          </a:xfrm>
+          <a:prstGeom prst="rect">
+            <a:avLst/>
+          </a:prstGeom>
+          <a:solidFill>
+            <a:srgbClr val="7030A0"/>
+          </a:solidFill>
+          <a:ln w="19050"/>
+        </p:spPr>
+        <p:style>
+          <a:lnRef idx="2">
+            <a:schemeClr val="accent1"/>
+          </a:lnRef>
+          <a:fillRef idx="1">
+            <a:schemeClr val="lt1"/>
+          </a:fillRef>
+          <a:effectRef idx="0">
+            <a:schemeClr val="accent1"/>
+          </a:effectRef>
+          <a:fontRef idx="minor">
+            <a:schemeClr val="dk1"/>
+          </a:fontRef>
+        </p:style>
+        <p:txBody>
+          <a:bodyPr lIns="124733" tIns="62367" rIns="124733" bIns="62367" rtlCol="0" anchor="ctr"/>
+          <a:lstStyle/>
+          <a:p>
+            <a:pPr algn="ctr"/>
+            <a:r>
+              <a:rPr lang="ru-RU" sz="700" dirty="0"/>
+              <a:t>Воссоздать систему гильдий </a:t>
+            </a:r>
+          </a:p>
+          <a:p>
+            <a:pPr algn="ctr"/>
+            <a:r>
+              <a:rPr lang="ru-RU" sz="100" dirty="0"/>
+              <a:t>(Корпоративизм в экономике: вместо классовой борьбы (марксизм) и дикого капитализма (либерализм) предлагалось воссоздать систему профессиональных корпораций (гильдий). Рабочие и предприниматели одной отрасли должны были объединяться в союзы для совместного решения споров, регулирования зарплат и защиты своих интересов под присмотром государства.)</a:t>
+            </a:r>
+          </a:p>
+        </p:txBody>
+      </p:sp>
+      <p:cxnSp>
+        <p:nvCxnSpPr>
+          <p:cNvPr id="600" name="Соединительная линия уступом 620">
+            <a:extLst>
+              <a:ext uri="{FF2B5EF4-FFF2-40B4-BE49-F238E27FC236}">
+                <a16:creationId xmlns:a16="http://schemas.microsoft.com/office/drawing/2014/main" id="{D844898B-574F-4D4A-840D-118F05027652}"/>
+              </a:ext>
+            </a:extLst>
+          </p:cNvPr>
+          <p:cNvCxnSpPr>
+            <a:cxnSpLocks/>
+            <a:stCxn id="571" idx="2"/>
+            <a:endCxn id="599" idx="0"/>
+          </p:cNvCxnSpPr>
+          <p:nvPr/>
+        </p:nvCxnSpPr>
+        <p:spPr>
+          <a:xfrm rot="5400000">
+            <a:off x="2579426" y="5389507"/>
+            <a:ext cx="239991" cy="1219146"/>
+          </a:xfrm>
+          <a:prstGeom prst="bentConnector3">
+            <a:avLst>
+              <a:gd name="adj1" fmla="val 50000"/>
+            </a:avLst>
+          </a:prstGeom>
+          <a:ln w="19050">
+            <a:tailEnd type="arrow"/>
+          </a:ln>
+        </p:spPr>
+        <p:style>
+          <a:lnRef idx="1">
+            <a:schemeClr val="accent1"/>
+          </a:lnRef>
+          <a:fillRef idx="0">
+            <a:schemeClr val="accent1"/>
+          </a:fillRef>
+          <a:effectRef idx="0">
+            <a:schemeClr val="accent1"/>
+          </a:effectRef>
+          <a:fontRef idx="minor">
+            <a:schemeClr val="tx1"/>
+          </a:fontRef>
+        </p:style>
+      </p:cxnSp>
     </p:spTree>
     <p:extLst>
       <p:ext uri="{BB962C8B-B14F-4D97-AF65-F5344CB8AC3E}">
